--- a/Topic_B/Exam_Practice/TB-L01_Speaking_Workshop_Identity_and_Personal_Profiles.pptx
+++ b/Topic_B/Exam_Practice/TB-L01_Speaking_Workshop_Identity_and_Personal_Profiles.pptx
@@ -615,7 +615,11 @@
           <a:lstStyle/>
           <a:p>
             <a:r>
-              <a:rPr lang="en-US" dirty="0"/>
+              <a:rPr lang="ar-SA" dirty="0">
+                <a:latin typeface="Amiri" pitchFamily="2" charset="-78"/>
+                <a:ea typeface="Amiri" pitchFamily="2" charset="-78"/>
+                <a:cs typeface="Amiri" pitchFamily="2" charset="-78"/>
+              </a:rPr>
               <a:t>ROLE PLAY C (Develop) — a video call.
 SET-UP IN THE BREAKOUT ROOM: A = examiner (reads the left column ONLY — the questions, in order), B = candidate (sees the task column; Core may use the help column), C = observer (ticks the feedback checklist). 1 minute preparation, about 3 minutes speaking, 1 minute feedback, then rotate.
 Task ! is the unexpected question: in the exam the candidate has not seen it — the examiner should read it without warning.
@@ -707,7 +711,11 @@
           <a:lstStyle/>
           <a:p>
             <a:r>
-              <a:rPr lang="en-US" dirty="0"/>
+              <a:rPr lang="ar-SA" dirty="0">
+                <a:latin typeface="Amiri" pitchFamily="2" charset="-78"/>
+                <a:ea typeface="Amiri" pitchFamily="2" charset="-78"/>
+                <a:cs typeface="Amiri" pitchFamily="2" charset="-78"/>
+              </a:rPr>
               <a:t>ROLE PLAY D (Stretch) — a youth-ambassador interview.
 SET-UP IN THE BREAKOUT ROOM: A = examiner (reads the left column ONLY — the questions, in order), B = candidate (sees the task column; Core may use the help column), C = observer (ticks the feedback checklist). 1 minute preparation, about 3 minutes speaking, 1 minute feedback, then rotate.
 Task ! is the unexpected question: in the exam the candidate has not seen it — the examiner should read it without warning.
@@ -1243,7 +1251,11 @@
           <a:lstStyle/>
           <a:p>
             <a:r>
-              <a:rPr lang="en-US" dirty="0"/>
+              <a:rPr lang="ar-SA" dirty="0">
+                <a:latin typeface="Amiri" pitchFamily="2" charset="-78"/>
+                <a:ea typeface="Amiri" pitchFamily="2" charset="-78"/>
+                <a:cs typeface="Amiri" pitchFamily="2" charset="-78"/>
+              </a:rPr>
               <a:t>TOPIC CONVERSATION — Core. Examiner asks the questions in order and may add “لِمَاذَا؟ / هَلْ يُمْكِنُ أَنْ تَشْرَحَ أَكْثَرَ؟” to push for more. Candidate aims for one full sentence per question.
 </a:t>
             </a:r>
@@ -1332,7 +1344,11 @@
           <a:lstStyle/>
           <a:p>
             <a:r>
-              <a:rPr lang="en-US" dirty="0"/>
+              <a:rPr lang="ar-SA" dirty="0">
+                <a:latin typeface="Amiri" pitchFamily="2" charset="-78"/>
+                <a:ea typeface="Amiri" pitchFamily="2" charset="-78"/>
+                <a:cs typeface="Amiri" pitchFamily="2" charset="-78"/>
+              </a:rPr>
               <a:t>TOPIC CONVERSATION — Develop. Examiner asks the questions in order and may add “لِمَاذَا؟ / هَلْ يُمْكِنُ أَنْ تَشْرَحَ أَكْثَرَ؟” to push for more. Candidate aims for two or three sentences, with a reason or a past detail.
 </a:t>
             </a:r>
@@ -1421,7 +1437,11 @@
           <a:lstStyle/>
           <a:p>
             <a:r>
-              <a:rPr lang="en-US" dirty="0"/>
+              <a:rPr lang="ar-SA" dirty="0">
+                <a:latin typeface="Amiri" pitchFamily="2" charset="-78"/>
+                <a:ea typeface="Amiri" pitchFamily="2" charset="-78"/>
+                <a:cs typeface="Amiri" pitchFamily="2" charset="-78"/>
+              </a:rPr>
               <a:t>TOPIC CONVERSATION — Stretch. Examiner asks the questions in order and may add “لِمَاذَا؟ / هَلْ يُمْكِنُ أَنْ تَشْرَحَ أَكْثَرَ؟” to push for more. Candidate aims for a developed answer: opinion, comparison, concession and a conditional.
 </a:t>
             </a:r>
@@ -1510,7 +1530,11 @@
           <a:lstStyle/>
           <a:p>
             <a:r>
-              <a:rPr lang="en-US" dirty="0"/>
+              <a:rPr lang="ar-SA" dirty="0">
+                <a:latin typeface="Amiri" pitchFamily="2" charset="-78"/>
+                <a:ea typeface="Amiri" pitchFamily="2" charset="-78"/>
+                <a:cs typeface="Amiri" pitchFamily="2" charset="-78"/>
+              </a:rPr>
               <a:t>WELCOME (1 min) — while students join.
 • Greet each student by name as they arrive: السَّلَامُ عَلَيْكُمْ. Take the register (Pastoral Tracker: attendance 0/1).
 • 2-MINUTE CHECK-IN (SEND training): a private chat to any student who seemed unsettled last lesson — “Are you okay today? 👍 / 👎”.
@@ -2224,7 +2248,11 @@
           <a:lstStyle/>
           <a:p>
             <a:r>
-              <a:rPr lang="en-US" dirty="0"/>
+              <a:rPr lang="ar-SA" dirty="0">
+                <a:latin typeface="Amiri" pitchFamily="2" charset="-78"/>
+                <a:ea typeface="Amiri" pitchFamily="2" charset="-78"/>
+                <a:cs typeface="Amiri" pitchFamily="2" charset="-78"/>
+              </a:rPr>
               <a:t>TEACH (3 min). Role play = precise and complete; conversation = develop. Choral repetition of the repair phrases. To a girl: تُعِيدِي.</a:t>
             </a:r>
             <a:endParaRPr lang="en-US" dirty="0"/>
@@ -2312,7 +2340,11 @@
           <a:lstStyle/>
           <a:p>
             <a:r>
-              <a:rPr lang="en-US" dirty="0"/>
+              <a:rPr lang="ar-SA" dirty="0">
+                <a:latin typeface="Amiri" pitchFamily="2" charset="-78"/>
+                <a:ea typeface="Amiri" pitchFamily="2" charset="-78"/>
+                <a:cs typeface="Amiri" pitchFamily="2" charset="-78"/>
+              </a:rPr>
               <a:t>LANGUAGE BANK (2 min) — attached pronouns: -ī (my), -hu (his), -hā (her), -ka / -ki (your m. / f.). Nominal sentences need no verb “to be”: أَنَا طَالِبٌ · هِيَ مِصْرِيَّةٌ.</a:t>
             </a:r>
             <a:endParaRPr lang="en-US" dirty="0"/>
@@ -2400,7 +2432,11 @@
           <a:lstStyle/>
           <a:p>
             <a:r>
-              <a:rPr lang="en-US" dirty="0"/>
+              <a:rPr lang="ar-SA" dirty="0">
+                <a:latin typeface="Amiri" pitchFamily="2" charset="-78"/>
+                <a:ea typeface="Amiri" pitchFamily="2" charset="-78"/>
+                <a:cs typeface="Amiri" pitchFamily="2" charset="-78"/>
+              </a:rPr>
               <a:t>LANGUAGE BANK (2 min) — the nisba: country + -iyy (m.) / -iyya (f.): مِصْرُ → مِصْرِيٌّ / مِصْرِيَّةٌ. Plural of people: مِصْرِيُّونَ. A girl always uses the feminine: أَنَا بِرِيطَانِيَّةٌ وَطَالِبَةٌ.</a:t>
             </a:r>
             <a:endParaRPr lang="en-US" dirty="0"/>
@@ -2576,7 +2612,11 @@
           <a:lstStyle/>
           <a:p>
             <a:r>
-              <a:rPr lang="en-US" dirty="0"/>
+              <a:rPr lang="ar-SA" dirty="0">
+                <a:latin typeface="Amiri" pitchFamily="2" charset="-78"/>
+                <a:ea typeface="Amiri" pitchFamily="2" charset="-78"/>
+                <a:cs typeface="Amiri" pitchFamily="2" charset="-78"/>
+              </a:rPr>
               <a:t>ROLE PLAY A (Core) — joining a club.
 SET-UP IN THE BREAKOUT ROOM: A = examiner (reads the left column ONLY — the questions, in order), B = candidate (sees the task column; Core may use the help column), C = observer (ticks the feedback checklist). 1 minute preparation, about 3 minutes speaking, 1 minute feedback, then rotate.
 Task ! is the unexpected question: in the exam the candidate has not seen it — the examiner should read it without warning.
@@ -2668,7 +2708,11 @@
           <a:lstStyle/>
           <a:p>
             <a:r>
-              <a:rPr lang="en-US" dirty="0"/>
+              <a:rPr lang="ar-SA" dirty="0">
+                <a:latin typeface="Amiri" pitchFamily="2" charset="-78"/>
+                <a:ea typeface="Amiri" pitchFamily="2" charset="-78"/>
+                <a:cs typeface="Amiri" pitchFamily="2" charset="-78"/>
+              </a:rPr>
               <a:t>ROLE PLAY B (Core+) — first day at school.
 SET-UP IN THE BREAKOUT ROOM: A = examiner (reads the left column ONLY — the questions, in order), B = candidate (sees the task column; Core may use the help column), C = observer (ticks the feedback checklist). 1 minute preparation, about 3 minutes speaking, 1 minute feedback, then rotate.
 Task ! is the unexpected question: in the exam the candidate has not seen it — the examiner should read it without warning.
@@ -3156,6 +3200,7 @@
                   <a:srgbClr val="D4AF37"/>
                 </a:solidFill>
                 <a:latin typeface="Amiri" pitchFamily="2" charset="-78"/>
+                <a:ea typeface="Amiri" pitchFamily="2" charset="-78"/>
                 <a:cs typeface="Amiri" pitchFamily="2" charset="-78"/>
               </a:rPr>
               <a:t>م</a:t>
@@ -3362,6 +3407,7 @@
                   <a:srgbClr val="D4AF37"/>
                 </a:solidFill>
                 <a:latin typeface="Amiri" pitchFamily="2" charset="-78"/>
+                <a:ea typeface="Amiri" pitchFamily="2" charset="-78"/>
                 <a:cs typeface="Amiri" pitchFamily="2" charset="-78"/>
               </a:rPr>
               <a:t>وَرْشَةُ التَّحَدُّثِ — الهُوِيَّةُ</a:t>
@@ -3819,6 +3865,7 @@
                   <a:srgbClr val="D4AF37"/>
                 </a:solidFill>
                 <a:latin typeface="Amiri" pitchFamily="2" charset="-78"/>
+                <a:ea typeface="Amiri" pitchFamily="2" charset="-78"/>
                 <a:cs typeface="Amiri" pitchFamily="2" charset="-78"/>
               </a:rPr>
               <a:t>م</a:t>
@@ -4139,6 +4186,7 @@
                   <a:srgbClr val="8A6D1E"/>
                 </a:solidFill>
                 <a:latin typeface="Amiri" pitchFamily="2" charset="-78"/>
+                <a:ea typeface="Amiri" pitchFamily="2" charset="-78"/>
                 <a:cs typeface="Amiri" pitchFamily="2" charset="-78"/>
               </a:rPr>
               <a:t>مُكَالَمَةٌ مَعَ شَرِيكِ التَّبَادُلِ</a:t>
@@ -4419,6 +4467,7 @@
                   <a:srgbClr val="1B3B6F"/>
                 </a:solidFill>
                 <a:latin typeface="Amiri" pitchFamily="2" charset="-78"/>
+                <a:ea typeface="Amiri" pitchFamily="2" charset="-78"/>
                 <a:cs typeface="Amiri" pitchFamily="2" charset="-78"/>
               </a:rPr>
               <a:t>اسْمِي … عُمْرِي … أَسْكُنُ …</a:t>
@@ -4495,6 +4544,7 @@
                   <a:srgbClr val="1B3B6F"/>
                 </a:solidFill>
                 <a:latin typeface="Amiri" pitchFamily="2" charset="-78"/>
+                <a:ea typeface="Amiri" pitchFamily="2" charset="-78"/>
                 <a:cs typeface="Amiri" pitchFamily="2" charset="-78"/>
               </a:rPr>
               <a:t>أَهْلًا! حَدِّثْنِي عَنْ نَفْسِكَ.</a:t>
@@ -4598,6 +4648,7 @@
                   <a:srgbClr val="1B3B6F"/>
                 </a:solidFill>
                 <a:latin typeface="Amiri" pitchFamily="2" charset="-78"/>
+                <a:ea typeface="Amiri" pitchFamily="2" charset="-78"/>
                 <a:cs typeface="Amiri" pitchFamily="2" charset="-78"/>
               </a:rPr>
               <a:t>لَا، وُلِدْتُ فِي … وَجِئْنَا إِلَى … عِنْدَمَا …</a:t>
@@ -4674,6 +4725,7 @@
                   <a:srgbClr val="1B3B6F"/>
                 </a:solidFill>
                 <a:latin typeface="Amiri" pitchFamily="2" charset="-78"/>
+                <a:ea typeface="Amiri" pitchFamily="2" charset="-78"/>
                 <a:cs typeface="Amiri" pitchFamily="2" charset="-78"/>
               </a:rPr>
               <a:t>هَلْ وُلِدْتَ فِي بِرِيطَانِيَا؟</a:t>
@@ -4777,6 +4829,7 @@
                   <a:srgbClr val="1B3B6F"/>
                 </a:solidFill>
                 <a:latin typeface="Amiri" pitchFamily="2" charset="-78"/>
+                <a:ea typeface="Amiri" pitchFamily="2" charset="-78"/>
                 <a:cs typeface="Amiri" pitchFamily="2" charset="-78"/>
               </a:rPr>
               <a:t>أَشْعُرُ أَنِّي … لِأَنَّ …</a:t>
@@ -4853,6 +4906,7 @@
                   <a:srgbClr val="1B3B6F"/>
                 </a:solidFill>
                 <a:latin typeface="Amiri" pitchFamily="2" charset="-78"/>
+                <a:ea typeface="Amiri" pitchFamily="2" charset="-78"/>
                 <a:cs typeface="Amiri" pitchFamily="2" charset="-78"/>
               </a:rPr>
               <a:t>هَلْ تَشْعُرُ أَنَّكَ بِرِيطَانِيٌّ أَمْ عِرَاقِيٌّ؟</a:t>
@@ -4956,6 +5010,7 @@
                   <a:srgbClr val="1B3B6F"/>
                 </a:solidFill>
                 <a:latin typeface="Amiri" pitchFamily="2" charset="-78"/>
+                <a:ea typeface="Amiri" pitchFamily="2" charset="-78"/>
                 <a:cs typeface="Amiri" pitchFamily="2" charset="-78"/>
               </a:rPr>
               <a:t>كَمْ …؟ وَمَاذَا …؟</a:t>
@@ -5032,6 +5087,7 @@
                   <a:srgbClr val="1B3B6F"/>
                 </a:solidFill>
                 <a:latin typeface="Amiri" pitchFamily="2" charset="-78"/>
+                <a:ea typeface="Amiri" pitchFamily="2" charset="-78"/>
                 <a:cs typeface="Amiri" pitchFamily="2" charset="-78"/>
               </a:rPr>
               <a:t>… أَنَا اسْمِي لَيْثٌ.</a:t>
@@ -5135,6 +5191,7 @@
                   <a:srgbClr val="1B3B6F"/>
                 </a:solidFill>
                 <a:latin typeface="Amiri" pitchFamily="2" charset="-78"/>
+                <a:ea typeface="Amiri" pitchFamily="2" charset="-78"/>
                 <a:cs typeface="Amiri" pitchFamily="2" charset="-78"/>
               </a:rPr>
               <a:t>أُرِيدُ أَنْ أَكُونَ … لِأَنَّ …</a:t>
@@ -5211,6 +5268,7 @@
                   <a:srgbClr val="1B3B6F"/>
                 </a:solidFill>
                 <a:latin typeface="Amiri" pitchFamily="2" charset="-78"/>
+                <a:ea typeface="Amiri" pitchFamily="2" charset="-78"/>
                 <a:cs typeface="Amiri" pitchFamily="2" charset="-78"/>
               </a:rPr>
               <a:t>مَاذَا تُرِيدُ أَنْ تَعْمَلَ فِي المُسْتَقْبَلِ؟</a:t>
@@ -5420,6 +5478,7 @@
                   <a:srgbClr val="D4AF37"/>
                 </a:solidFill>
                 <a:latin typeface="Amiri" pitchFamily="2" charset="-78"/>
+                <a:ea typeface="Amiri" pitchFamily="2" charset="-78"/>
                 <a:cs typeface="Amiri" pitchFamily="2" charset="-78"/>
               </a:rPr>
               <a:t>م</a:t>
@@ -5740,6 +5799,7 @@
                   <a:srgbClr val="8A6D1E"/>
                 </a:solidFill>
                 <a:latin typeface="Amiri" pitchFamily="2" charset="-78"/>
+                <a:ea typeface="Amiri" pitchFamily="2" charset="-78"/>
                 <a:cs typeface="Amiri" pitchFamily="2" charset="-78"/>
               </a:rPr>
               <a:t>سَفِيرُ الشَّبَابِ</a:t>
@@ -6020,6 +6080,7 @@
                   <a:srgbClr val="1B3B6F"/>
                 </a:solidFill>
                 <a:latin typeface="Amiri" pitchFamily="2" charset="-78"/>
+                <a:ea typeface="Amiri" pitchFamily="2" charset="-78"/>
                 <a:cs typeface="Amiri" pitchFamily="2" charset="-78"/>
               </a:rPr>
               <a:t>أَنَا … وَمَا يُمَيِّزُنِي أَنِّي …</a:t>
@@ -6096,6 +6157,7 @@
                   <a:srgbClr val="1B3B6F"/>
                 </a:solidFill>
                 <a:latin typeface="Amiri" pitchFamily="2" charset="-78"/>
+                <a:ea typeface="Amiri" pitchFamily="2" charset="-78"/>
                 <a:cs typeface="Amiri" pitchFamily="2" charset="-78"/>
               </a:rPr>
               <a:t>عَرِّفْنَا بِنَفْسِكَ بِاخْتِصَارٍ.</a:t>
@@ -6199,6 +6261,7 @@
                   <a:srgbClr val="1B3B6F"/>
                 </a:solidFill>
                 <a:latin typeface="Amiri" pitchFamily="2" charset="-78"/>
+                <a:ea typeface="Amiri" pitchFamily="2" charset="-78"/>
                 <a:cs typeface="Amiri" pitchFamily="2" charset="-78"/>
               </a:rPr>
               <a:t>عِنْدَمَا كُنْتُ صَغِيرًا كَانَ … فَتَعَلَّمْتُ …</a:t>
@@ -6275,6 +6338,7 @@
                   <a:srgbClr val="1B3B6F"/>
                 </a:solidFill>
                 <a:latin typeface="Amiri" pitchFamily="2" charset="-78"/>
+                <a:ea typeface="Amiri" pitchFamily="2" charset="-78"/>
                 <a:cs typeface="Amiri" pitchFamily="2" charset="-78"/>
               </a:rPr>
               <a:t>كَيْفَ أَثَّرَتْ أُسْرَتُكَ فِي شَخْصِيَّتِكَ؟</a:t>
@@ -6378,6 +6442,7 @@
                   <a:srgbClr val="1B3B6F"/>
                 </a:solidFill>
                 <a:latin typeface="Amiri" pitchFamily="2" charset="-78"/>
+                <a:ea typeface="Amiri" pitchFamily="2" charset="-78"/>
                 <a:cs typeface="Amiri" pitchFamily="2" charset="-78"/>
               </a:rPr>
               <a:t>صَحِيحٌ أَنَّ … غَيْرَ أَنَّ …</a:t>
@@ -6454,6 +6519,7 @@
                   <a:srgbClr val="1B3B6F"/>
                 </a:solidFill>
                 <a:latin typeface="Amiri" pitchFamily="2" charset="-78"/>
+                <a:ea typeface="Amiri" pitchFamily="2" charset="-78"/>
                 <a:cs typeface="Amiri" pitchFamily="2" charset="-78"/>
               </a:rPr>
               <a:t>هَلْ مِنَ الصَّعْبِ أَنْ تَعِيشَ بَيْنَ ثَقَافَتَيْنِ؟</a:t>
@@ -6557,6 +6623,7 @@
                   <a:srgbClr val="1B3B6F"/>
                 </a:solidFill>
                 <a:latin typeface="Amiri" pitchFamily="2" charset="-78"/>
+                <a:ea typeface="Amiri" pitchFamily="2" charset="-78"/>
                 <a:cs typeface="Amiri" pitchFamily="2" charset="-78"/>
               </a:rPr>
               <a:t>إِذَا اخْتَرْتُمُونِي، سَأُنَظِّمُ …</a:t>
@@ -6633,6 +6700,7 @@
                   <a:srgbClr val="1B3B6F"/>
                 </a:solidFill>
                 <a:latin typeface="Amiri" pitchFamily="2" charset="-78"/>
+                <a:ea typeface="Amiri" pitchFamily="2" charset="-78"/>
                 <a:cs typeface="Amiri" pitchFamily="2" charset="-78"/>
               </a:rPr>
               <a:t>مَا الَّذِي سَتَفْعَلُهُ إِذَا اخْتَرْنَاكَ؟</a:t>
@@ -6736,6 +6804,7 @@
                   <a:srgbClr val="1B3B6F"/>
                 </a:solidFill>
                 <a:latin typeface="Amiri" pitchFamily="2" charset="-78"/>
+                <a:ea typeface="Amiri" pitchFamily="2" charset="-78"/>
                 <a:cs typeface="Amiri" pitchFamily="2" charset="-78"/>
               </a:rPr>
               <a:t>لَوِ اسْتَطَعْتُ، لَجَعَلْتُ …</a:t>
@@ -6815,6 +6884,7 @@
                   <a:srgbClr val="1B3B6F"/>
                 </a:solidFill>
                 <a:latin typeface="Amiri" pitchFamily="2" charset="-78"/>
+                <a:ea typeface="Amiri" pitchFamily="2" charset="-78"/>
                 <a:cs typeface="Amiri" pitchFamily="2" charset="-78"/>
               </a:rPr>
               <a:t>لَوِ اسْتَطَعْتَ أَنْ تُغَيِّرَ شَيْئًا فِي نَظْرَةِ النَّاسِ إِلَى الشَّبَابِ، فَمَاذَا يَكُونُ؟</a:t>
@@ -7024,6 +7094,7 @@
                   <a:srgbClr val="D4AF37"/>
                 </a:solidFill>
                 <a:latin typeface="Amiri" pitchFamily="2" charset="-78"/>
+                <a:ea typeface="Amiri" pitchFamily="2" charset="-78"/>
                 <a:cs typeface="Amiri" pitchFamily="2" charset="-78"/>
               </a:rPr>
               <a:t>م</a:t>
@@ -7344,6 +7415,7 @@
                   <a:srgbClr val="8A6D1E"/>
                 </a:solidFill>
                 <a:latin typeface="Amiri" pitchFamily="2" charset="-78"/>
+                <a:ea typeface="Amiri" pitchFamily="2" charset="-78"/>
                 <a:cs typeface="Amiri" pitchFamily="2" charset="-78"/>
               </a:rPr>
               <a:t>وَرَقَةُ المُلَاحِظِ</a:t>
@@ -8814,6 +8886,7 @@
                   <a:srgbClr val="D4AF37"/>
                 </a:solidFill>
                 <a:latin typeface="Amiri" pitchFamily="2" charset="-78"/>
+                <a:ea typeface="Amiri" pitchFamily="2" charset="-78"/>
                 <a:cs typeface="Amiri" pitchFamily="2" charset="-78"/>
               </a:rPr>
               <a:t>م</a:t>
@@ -9134,6 +9207,7 @@
                   <a:srgbClr val="8A6D1E"/>
                 </a:solidFill>
                 <a:latin typeface="Amiri" pitchFamily="2" charset="-78"/>
+                <a:ea typeface="Amiri" pitchFamily="2" charset="-78"/>
                 <a:cs typeface="Amiri" pitchFamily="2" charset="-78"/>
               </a:rPr>
               <a:t>نَمُوذَجُ الإِجَابَةِ</a:t>
@@ -9376,6 +9450,7 @@
                   <a:srgbClr val="1B3B6F"/>
                 </a:solidFill>
                 <a:latin typeface="Amiri" pitchFamily="2" charset="-78"/>
+                <a:ea typeface="Amiri" pitchFamily="2" charset="-78"/>
                 <a:cs typeface="Amiri" pitchFamily="2" charset="-78"/>
               </a:rPr>
               <a:t>اسْمِي آدَمُ يُوسُفُ عَلِيٌّ.</a:t>
@@ -9452,6 +9527,7 @@
                   <a:srgbClr val="1B3B6F"/>
                 </a:solidFill>
                 <a:latin typeface="Amiri" pitchFamily="2" charset="-78"/>
+                <a:ea typeface="Amiri" pitchFamily="2" charset="-78"/>
                 <a:cs typeface="Amiri" pitchFamily="2" charset="-78"/>
               </a:rPr>
               <a:t>أَهْلًا! مَا اسْمُكَ الكَامِلُ؟</a:t>
@@ -9555,6 +9631,7 @@
                   <a:srgbClr val="1B3B6F"/>
                 </a:solidFill>
                 <a:latin typeface="Amiri" pitchFamily="2" charset="-78"/>
+                <a:ea typeface="Amiri" pitchFamily="2" charset="-78"/>
                 <a:cs typeface="Amiri" pitchFamily="2" charset="-78"/>
               </a:rPr>
               <a:t>عُمْرِي خَمْسَ عَشْرَةَ سَنَةً.</a:t>
@@ -9631,6 +9708,7 @@
                   <a:srgbClr val="1B3B6F"/>
                 </a:solidFill>
                 <a:latin typeface="Amiri" pitchFamily="2" charset="-78"/>
+                <a:ea typeface="Amiri" pitchFamily="2" charset="-78"/>
                 <a:cs typeface="Amiri" pitchFamily="2" charset="-78"/>
               </a:rPr>
               <a:t>كَمْ عُمْرُكَ؟</a:t>
@@ -9734,6 +9812,7 @@
                   <a:srgbClr val="1B3B6F"/>
                 </a:solidFill>
                 <a:latin typeface="Amiri" pitchFamily="2" charset="-78"/>
+                <a:ea typeface="Amiri" pitchFamily="2" charset="-78"/>
                 <a:cs typeface="Amiri" pitchFamily="2" charset="-78"/>
               </a:rPr>
               <a:t>عِيدُ مِيلَادِي فِي العَاشِرِ مِنْ مَارِسَ.</a:t>
@@ -9810,6 +9889,7 @@
                   <a:srgbClr val="1B3B6F"/>
                 </a:solidFill>
                 <a:latin typeface="Amiri" pitchFamily="2" charset="-78"/>
+                <a:ea typeface="Amiri" pitchFamily="2" charset="-78"/>
                 <a:cs typeface="Amiri" pitchFamily="2" charset="-78"/>
               </a:rPr>
               <a:t>مَتَى عِيدُ مِيلَادِكَ؟</a:t>
@@ -9913,6 +9993,7 @@
                   <a:srgbClr val="1B3B6F"/>
                 </a:solidFill>
                 <a:latin typeface="Amiri" pitchFamily="2" charset="-78"/>
+                <a:ea typeface="Amiri" pitchFamily="2" charset="-78"/>
                 <a:cs typeface="Amiri" pitchFamily="2" charset="-78"/>
               </a:rPr>
               <a:t>أَسْكُنُ فِي بَرْمِنْغْهَامَ، فِي شَارِعٍ قَرِيبٍ مِنَ النَّادِي.</a:t>
@@ -9989,6 +10070,7 @@
                   <a:srgbClr val="1B3B6F"/>
                 </a:solidFill>
                 <a:latin typeface="Amiri" pitchFamily="2" charset="-78"/>
+                <a:ea typeface="Amiri" pitchFamily="2" charset="-78"/>
                 <a:cs typeface="Amiri" pitchFamily="2" charset="-78"/>
               </a:rPr>
               <a:t>أَيْنَ تَسْكُنُ؟</a:t>
@@ -10092,6 +10174,7 @@
                   <a:srgbClr val="1B3B6F"/>
                 </a:solidFill>
                 <a:latin typeface="Amiri" pitchFamily="2" charset="-78"/>
+                <a:ea typeface="Amiri" pitchFamily="2" charset="-78"/>
                 <a:cs typeface="Amiri" pitchFamily="2" charset="-78"/>
               </a:rPr>
               <a:t>أَنَا بِرِيطَانِيٌّ، وَأَصْلِي مِنَ اليَمَنِ.</a:t>
@@ -10168,6 +10251,7 @@
                   <a:srgbClr val="1B3B6F"/>
                 </a:solidFill>
                 <a:latin typeface="Amiri" pitchFamily="2" charset="-78"/>
+                <a:ea typeface="Amiri" pitchFamily="2" charset="-78"/>
                 <a:cs typeface="Amiri" pitchFamily="2" charset="-78"/>
               </a:rPr>
               <a:t>مَا جِنْسِيَّتُكَ؟</a:t>
@@ -10377,6 +10461,7 @@
                   <a:srgbClr val="D4AF37"/>
                 </a:solidFill>
                 <a:latin typeface="Amiri" pitchFamily="2" charset="-78"/>
+                <a:ea typeface="Amiri" pitchFamily="2" charset="-78"/>
                 <a:cs typeface="Amiri" pitchFamily="2" charset="-78"/>
               </a:rPr>
               <a:t>م</a:t>
@@ -10697,6 +10782,7 @@
                   <a:srgbClr val="8A6D1E"/>
                 </a:solidFill>
                 <a:latin typeface="Amiri" pitchFamily="2" charset="-78"/>
+                <a:ea typeface="Amiri" pitchFamily="2" charset="-78"/>
                 <a:cs typeface="Amiri" pitchFamily="2" charset="-78"/>
               </a:rPr>
               <a:t>نَمُوذَجُ الإِجَابَةِ</a:t>
@@ -10939,6 +11025,7 @@
                   <a:srgbClr val="1B3B6F"/>
                 </a:solidFill>
                 <a:latin typeface="Amiri" pitchFamily="2" charset="-78"/>
+                <a:ea typeface="Amiri" pitchFamily="2" charset="-78"/>
                 <a:cs typeface="Amiri" pitchFamily="2" charset="-78"/>
               </a:rPr>
               <a:t>أَهْلًا وَسَهْلًا! اسْمِي سَلْمَى، وَأَنَا فِي هٰذَا الصَّفِّ مُنْذُ سَنَتَيْنِ.</a:t>
@@ -11015,6 +11102,7 @@
                   <a:srgbClr val="1B3B6F"/>
                 </a:solidFill>
                 <a:latin typeface="Amiri" pitchFamily="2" charset="-78"/>
+                <a:ea typeface="Amiri" pitchFamily="2" charset="-78"/>
                 <a:cs typeface="Amiri" pitchFamily="2" charset="-78"/>
               </a:rPr>
               <a:t>مَرْحَبًا، أَنَا جَدِيدٌ هُنَا. مَا اسْمُكَ؟</a:t>
@@ -11118,6 +11206,7 @@
                   <a:srgbClr val="1B3B6F"/>
                 </a:solidFill>
                 <a:latin typeface="Amiri" pitchFamily="2" charset="-78"/>
+                <a:ea typeface="Amiri" pitchFamily="2" charset="-78"/>
                 <a:cs typeface="Amiri" pitchFamily="2" charset="-78"/>
               </a:rPr>
               <a:t>أَنَا مِنْ لَنْدَنَ، لٰكِنِّي وُلِدْتُ فِي القَاهِرَةِ.</a:t>
@@ -11194,6 +11283,7 @@
                   <a:srgbClr val="1B3B6F"/>
                 </a:solidFill>
                 <a:latin typeface="Amiri" pitchFamily="2" charset="-78"/>
+                <a:ea typeface="Amiri" pitchFamily="2" charset="-78"/>
                 <a:cs typeface="Amiri" pitchFamily="2" charset="-78"/>
               </a:rPr>
               <a:t>مِنْ أَيْنَ أَنْتِ؟</a:t>
@@ -11297,6 +11387,7 @@
                   <a:srgbClr val="1B3B6F"/>
                 </a:solidFill>
                 <a:latin typeface="Amiri" pitchFamily="2" charset="-78"/>
+                <a:ea typeface="Amiri" pitchFamily="2" charset="-78"/>
                 <a:cs typeface="Amiri" pitchFamily="2" charset="-78"/>
               </a:rPr>
               <a:t>رَائِعٌ! أَيَّ لُغَاتٍ تَتَكَلَّمُ؟</a:t>
@@ -11373,6 +11464,7 @@
                   <a:srgbClr val="1B3B6F"/>
                 </a:solidFill>
                 <a:latin typeface="Amiri" pitchFamily="2" charset="-78"/>
+                <a:ea typeface="Amiri" pitchFamily="2" charset="-78"/>
                 <a:cs typeface="Amiri" pitchFamily="2" charset="-78"/>
               </a:rPr>
               <a:t>… أَنَا مِنْ تُونِسَ.</a:t>
@@ -11476,6 +11568,7 @@
                   <a:srgbClr val="1B3B6F"/>
                 </a:solidFill>
                 <a:latin typeface="Amiri" pitchFamily="2" charset="-78"/>
+                <a:ea typeface="Amiri" pitchFamily="2" charset="-78"/>
                 <a:cs typeface="Amiri" pitchFamily="2" charset="-78"/>
               </a:rPr>
               <a:t>أَتَكَلَّمُ الإِنْجِلِيزِيَّةَ جَيِّدًا، وَالعَرَبِيَّةَ قَلِيلًا، لٰكِنِّي أَتَعَلَّمُهَا الآنَ.</a:t>
@@ -11552,6 +11645,7 @@
                   <a:srgbClr val="1B3B6F"/>
                 </a:solidFill>
                 <a:latin typeface="Amiri" pitchFamily="2" charset="-78"/>
+                <a:ea typeface="Amiri" pitchFamily="2" charset="-78"/>
                 <a:cs typeface="Amiri" pitchFamily="2" charset="-78"/>
               </a:rPr>
               <a:t>العَرَبِيَّةَ وَالفَرَنْسِيَّةَ. وَأَنْتِ؟</a:t>
@@ -11655,6 +11749,7 @@
                   <a:srgbClr val="1B3B6F"/>
                 </a:solidFill>
                 <a:latin typeface="Amiri" pitchFamily="2" charset="-78"/>
+                <a:ea typeface="Amiri" pitchFamily="2" charset="-78"/>
                 <a:cs typeface="Amiri" pitchFamily="2" charset="-78"/>
               </a:rPr>
               <a:t>اسْمُهَا الأُسْتَاذَةُ مَرْيَمُ، وَهِيَ لَطِيفَةٌ وَصَبُورَةٌ جِدًّا.</a:t>
@@ -11731,6 +11826,7 @@
                   <a:srgbClr val="1B3B6F"/>
                 </a:solidFill>
                 <a:latin typeface="Amiri" pitchFamily="2" charset="-78"/>
+                <a:ea typeface="Amiri" pitchFamily="2" charset="-78"/>
                 <a:cs typeface="Amiri" pitchFamily="2" charset="-78"/>
               </a:rPr>
               <a:t>مَنْ مُعَلِّمُ العَرَبِيَّةِ؟</a:t>
@@ -11940,6 +12036,7 @@
                   <a:srgbClr val="D4AF37"/>
                 </a:solidFill>
                 <a:latin typeface="Amiri" pitchFamily="2" charset="-78"/>
+                <a:ea typeface="Amiri" pitchFamily="2" charset="-78"/>
                 <a:cs typeface="Amiri" pitchFamily="2" charset="-78"/>
               </a:rPr>
               <a:t>م</a:t>
@@ -12260,6 +12357,7 @@
                   <a:srgbClr val="8A6D1E"/>
                 </a:solidFill>
                 <a:latin typeface="Amiri" pitchFamily="2" charset="-78"/>
+                <a:ea typeface="Amiri" pitchFamily="2" charset="-78"/>
                 <a:cs typeface="Amiri" pitchFamily="2" charset="-78"/>
               </a:rPr>
               <a:t>نَمُوذَجُ الإِجَابَةِ</a:t>
@@ -12502,6 +12600,7 @@
                   <a:srgbClr val="1B3B6F"/>
                 </a:solidFill>
                 <a:latin typeface="Amiri" pitchFamily="2" charset="-78"/>
+                <a:ea typeface="Amiri" pitchFamily="2" charset="-78"/>
                 <a:cs typeface="Amiri" pitchFamily="2" charset="-78"/>
               </a:rPr>
               <a:t>اسْمِي عُمَرُ، عُمْرِي سِتَّ عَشْرَةَ سَنَةً، وَأَسْكُنُ مَعَ أُسْرَتِي فِي مَانْشِسْتَرَ.</a:t>
@@ -12578,6 +12677,7 @@
                   <a:srgbClr val="1B3B6F"/>
                 </a:solidFill>
                 <a:latin typeface="Amiri" pitchFamily="2" charset="-78"/>
+                <a:ea typeface="Amiri" pitchFamily="2" charset="-78"/>
                 <a:cs typeface="Amiri" pitchFamily="2" charset="-78"/>
               </a:rPr>
               <a:t>أَهْلًا! حَدِّثْنِي عَنْ نَفْسِكَ.</a:t>
@@ -12681,6 +12781,7 @@
                   <a:srgbClr val="1B3B6F"/>
                 </a:solidFill>
                 <a:latin typeface="Amiri" pitchFamily="2" charset="-78"/>
+                <a:ea typeface="Amiri" pitchFamily="2" charset="-78"/>
                 <a:cs typeface="Amiri" pitchFamily="2" charset="-78"/>
               </a:rPr>
               <a:t>لَا، وُلِدْتُ فِي بَغْدَادَ، وَجِئْنَا إِلَى بِرِيطَانِيَا عِنْدَمَا كَانَ عُمْرِي خَمْسَ سَنَوَاتٍ.</a:t>
@@ -12757,6 +12858,7 @@
                   <a:srgbClr val="1B3B6F"/>
                 </a:solidFill>
                 <a:latin typeface="Amiri" pitchFamily="2" charset="-78"/>
+                <a:ea typeface="Amiri" pitchFamily="2" charset="-78"/>
                 <a:cs typeface="Amiri" pitchFamily="2" charset="-78"/>
               </a:rPr>
               <a:t>هَلْ وُلِدْتَ فِي بِرِيطَانِيَا؟</a:t>
@@ -12860,6 +12962,7 @@
                   <a:srgbClr val="1B3B6F"/>
                 </a:solidFill>
                 <a:latin typeface="Amiri" pitchFamily="2" charset="-78"/>
+                <a:ea typeface="Amiri" pitchFamily="2" charset="-78"/>
                 <a:cs typeface="Amiri" pitchFamily="2" charset="-78"/>
               </a:rPr>
               <a:t>أَشْعُرُ أَنِّي الِاثْنَانِ مَعًا، لِأَنِّي أُحِبُّ ثَقَافَةَ البَلَدَيْنِ.</a:t>
@@ -12936,6 +13039,7 @@
                   <a:srgbClr val="1B3B6F"/>
                 </a:solidFill>
                 <a:latin typeface="Amiri" pitchFamily="2" charset="-78"/>
+                <a:ea typeface="Amiri" pitchFamily="2" charset="-78"/>
                 <a:cs typeface="Amiri" pitchFamily="2" charset="-78"/>
               </a:rPr>
               <a:t>هَلْ تَشْعُرُ أَنَّكَ بِرِيطَانِيٌّ أَمْ عِرَاقِيٌّ؟</a:t>
@@ -13039,6 +13143,7 @@
                   <a:srgbClr val="1B3B6F"/>
                 </a:solidFill>
                 <a:latin typeface="Amiri" pitchFamily="2" charset="-78"/>
+                <a:ea typeface="Amiri" pitchFamily="2" charset="-78"/>
                 <a:cs typeface="Amiri" pitchFamily="2" charset="-78"/>
               </a:rPr>
               <a:t>كَمْ عُمْرُكَ يَا لَيْثُ؟ وَمَاذَا تُحِبُّ أَنْ تَفْعَلَ فِي وَقْتِ الفَرَاغِ؟</a:t>
@@ -13115,6 +13220,7 @@
                   <a:srgbClr val="1B3B6F"/>
                 </a:solidFill>
                 <a:latin typeface="Amiri" pitchFamily="2" charset="-78"/>
+                <a:ea typeface="Amiri" pitchFamily="2" charset="-78"/>
                 <a:cs typeface="Amiri" pitchFamily="2" charset="-78"/>
               </a:rPr>
               <a:t>… أَنَا اسْمِي لَيْثٌ.</a:t>
@@ -13218,6 +13324,7 @@
                   <a:srgbClr val="1B3B6F"/>
                 </a:solidFill>
                 <a:latin typeface="Amiri" pitchFamily="2" charset="-78"/>
+                <a:ea typeface="Amiri" pitchFamily="2" charset="-78"/>
                 <a:cs typeface="Amiri" pitchFamily="2" charset="-78"/>
               </a:rPr>
               <a:t>أُرِيدُ أَنْ أَكُونَ مُهَنْدِسًا، لِأَنِّي أُحِبُّ الرِّيَاضِيَّاتِ وَالتَّصْمِيمَ.</a:t>
@@ -13294,6 +13401,7 @@
                   <a:srgbClr val="1B3B6F"/>
                 </a:solidFill>
                 <a:latin typeface="Amiri" pitchFamily="2" charset="-78"/>
+                <a:ea typeface="Amiri" pitchFamily="2" charset="-78"/>
                 <a:cs typeface="Amiri" pitchFamily="2" charset="-78"/>
               </a:rPr>
               <a:t>مَاذَا تُرِيدُ أَنْ تَعْمَلَ فِي المُسْتَقْبَلِ؟</a:t>
@@ -13503,6 +13611,7 @@
                   <a:srgbClr val="D4AF37"/>
                 </a:solidFill>
                 <a:latin typeface="Amiri" pitchFamily="2" charset="-78"/>
+                <a:ea typeface="Amiri" pitchFamily="2" charset="-78"/>
                 <a:cs typeface="Amiri" pitchFamily="2" charset="-78"/>
               </a:rPr>
               <a:t>م</a:t>
@@ -13823,6 +13932,7 @@
                   <a:srgbClr val="8A6D1E"/>
                 </a:solidFill>
                 <a:latin typeface="Amiri" pitchFamily="2" charset="-78"/>
+                <a:ea typeface="Amiri" pitchFamily="2" charset="-78"/>
                 <a:cs typeface="Amiri" pitchFamily="2" charset="-78"/>
               </a:rPr>
               <a:t>نَمُوذَجُ الإِجَابَةِ</a:t>
@@ -14065,6 +14175,7 @@
                   <a:srgbClr val="1B3B6F"/>
                 </a:solidFill>
                 <a:latin typeface="Amiri" pitchFamily="2" charset="-78"/>
+                <a:ea typeface="Amiri" pitchFamily="2" charset="-78"/>
                 <a:cs typeface="Amiri" pitchFamily="2" charset="-78"/>
               </a:rPr>
               <a:t>أَنَا يُوسُفُ، طَالِبٌ فِي السَّنَةِ الحَادِيَةَ عَشْرَةَ، وَمَا يُمَيِّزُنِي أَنِّي أَتَكَلَّمُ ثَلَاثَ لُغَاتٍ.</a:t>
@@ -14141,6 +14252,7 @@
                   <a:srgbClr val="1B3B6F"/>
                 </a:solidFill>
                 <a:latin typeface="Amiri" pitchFamily="2" charset="-78"/>
+                <a:ea typeface="Amiri" pitchFamily="2" charset="-78"/>
                 <a:cs typeface="Amiri" pitchFamily="2" charset="-78"/>
               </a:rPr>
               <a:t>عَرِّفْنَا بِنَفْسِكَ بِاخْتِصَارٍ.</a:t>
@@ -14244,6 +14356,7 @@
                   <a:srgbClr val="1B3B6F"/>
                 </a:solidFill>
                 <a:latin typeface="Amiri" pitchFamily="2" charset="-78"/>
+                <a:ea typeface="Amiri" pitchFamily="2" charset="-78"/>
                 <a:cs typeface="Amiri" pitchFamily="2" charset="-78"/>
               </a:rPr>
               <a:t>عِنْدَمَا كُنْتُ صَغِيرًا، كَانَ جَدِّي يَحْكِي لِي قِصَصًا عَنْ فِلَسْطِينَ، فَتَعَلَّمْتُ أَنْ أَعْتَزَّ بِأَصْلِي.</a:t>
@@ -14320,6 +14433,7 @@
                   <a:srgbClr val="1B3B6F"/>
                 </a:solidFill>
                 <a:latin typeface="Amiri" pitchFamily="2" charset="-78"/>
+                <a:ea typeface="Amiri" pitchFamily="2" charset="-78"/>
                 <a:cs typeface="Amiri" pitchFamily="2" charset="-78"/>
               </a:rPr>
               <a:t>كَيْفَ أَثَّرَتْ أُسْرَتُكَ فِي شَخْصِيَّتِكَ؟</a:t>
@@ -14423,6 +14537,7 @@
                   <a:srgbClr val="1B3B6F"/>
                 </a:solidFill>
                 <a:latin typeface="Amiri" pitchFamily="2" charset="-78"/>
+                <a:ea typeface="Amiri" pitchFamily="2" charset="-78"/>
                 <a:cs typeface="Amiri" pitchFamily="2" charset="-78"/>
               </a:rPr>
               <a:t>صَحِيحٌ أَنَّ ذٰلِكَ صَعْبٌ أَحْيَانًا، غَيْرَ أَنَّهُ يُعْطِينِي نَظْرَتَيْنِ إِلَى العَالَمِ بَدَلًا مِنْ نَظْرَةٍ وَاحِدَةٍ.</a:t>
@@ -14499,6 +14614,7 @@
                   <a:srgbClr val="1B3B6F"/>
                 </a:solidFill>
                 <a:latin typeface="Amiri" pitchFamily="2" charset="-78"/>
+                <a:ea typeface="Amiri" pitchFamily="2" charset="-78"/>
                 <a:cs typeface="Amiri" pitchFamily="2" charset="-78"/>
               </a:rPr>
               <a:t>هَلْ مِنَ الصَّعْبِ أَنْ تَعِيشَ بَيْنَ ثَقَافَتَيْنِ؟</a:t>
@@ -14602,6 +14718,7 @@
                   <a:srgbClr val="1B3B6F"/>
                 </a:solidFill>
                 <a:latin typeface="Amiri" pitchFamily="2" charset="-78"/>
+                <a:ea typeface="Amiri" pitchFamily="2" charset="-78"/>
                 <a:cs typeface="Amiri" pitchFamily="2" charset="-78"/>
               </a:rPr>
               <a:t>إِذَا اخْتَرْتُمُونِي، سَأُنَظِّمُ يَوْمًا ثَقَافِيًّا يُعَرِّفُ الطُّلَّابَ بِبُلْدَانِ زُمَلَائِهِمْ.</a:t>
@@ -14678,6 +14795,7 @@
                   <a:srgbClr val="1B3B6F"/>
                 </a:solidFill>
                 <a:latin typeface="Amiri" pitchFamily="2" charset="-78"/>
+                <a:ea typeface="Amiri" pitchFamily="2" charset="-78"/>
                 <a:cs typeface="Amiri" pitchFamily="2" charset="-78"/>
               </a:rPr>
               <a:t>مَا الَّذِي سَتَفْعَلُهُ إِذَا اخْتَرْنَاكَ؟</a:t>
@@ -14781,6 +14899,7 @@
                   <a:srgbClr val="1B3B6F"/>
                 </a:solidFill>
                 <a:latin typeface="Amiri" pitchFamily="2" charset="-78"/>
+                <a:ea typeface="Amiri" pitchFamily="2" charset="-78"/>
                 <a:cs typeface="Amiri" pitchFamily="2" charset="-78"/>
               </a:rPr>
               <a:t>لَوِ اسْتَطَعْتُ، لَجَعَلْتُ النَّاسَ يَسْمَعُونَ آرَاءَ الشَّبَابِ قَبْلَ أَنْ يَحْكُمُوا عَلَيْهِمْ.</a:t>
@@ -14860,6 +14979,7 @@
                   <a:srgbClr val="1B3B6F"/>
                 </a:solidFill>
                 <a:latin typeface="Amiri" pitchFamily="2" charset="-78"/>
+                <a:ea typeface="Amiri" pitchFamily="2" charset="-78"/>
                 <a:cs typeface="Amiri" pitchFamily="2" charset="-78"/>
               </a:rPr>
               <a:t>لَوِ اسْتَطَعْتَ أَنْ تُغَيِّرَ شَيْئًا فِي نَظْرَةِ النَّاسِ إِلَى الشَّبَابِ، فَمَاذَا يَكُونُ؟</a:t>
@@ -15069,6 +15189,7 @@
                   <a:srgbClr val="D4AF37"/>
                 </a:solidFill>
                 <a:latin typeface="Amiri" pitchFamily="2" charset="-78"/>
+                <a:ea typeface="Amiri" pitchFamily="2" charset="-78"/>
                 <a:cs typeface="Amiri" pitchFamily="2" charset="-78"/>
               </a:rPr>
               <a:t>م</a:t>
@@ -15389,6 +15510,7 @@
                   <a:srgbClr val="8A6D1E"/>
                 </a:solidFill>
                 <a:latin typeface="Amiri" pitchFamily="2" charset="-78"/>
+                <a:ea typeface="Amiri" pitchFamily="2" charset="-78"/>
                 <a:cs typeface="Amiri" pitchFamily="2" charset="-78"/>
               </a:rPr>
               <a:t>أَنَا</a:t>
@@ -15669,6 +15791,7 @@
                   <a:srgbClr val="1B3B6F"/>
                 </a:solidFill>
                 <a:latin typeface="Amiri" pitchFamily="2" charset="-78"/>
+                <a:ea typeface="Amiri" pitchFamily="2" charset="-78"/>
                 <a:cs typeface="Amiri" pitchFamily="2" charset="-78"/>
               </a:rPr>
               <a:t>اسْمِي … وَعُمْرِي …</a:t>
@@ -15745,6 +15868,7 @@
                   <a:srgbClr val="1B3B6F"/>
                 </a:solidFill>
                 <a:latin typeface="Amiri" pitchFamily="2" charset="-78"/>
+                <a:ea typeface="Amiri" pitchFamily="2" charset="-78"/>
                 <a:cs typeface="Amiri" pitchFamily="2" charset="-78"/>
               </a:rPr>
               <a:t>مَا اسْمُكَ؟ وَكَمْ عُمْرُكَ؟</a:t>
@@ -15913,6 +16037,7 @@
                   <a:srgbClr val="1B3B6F"/>
                 </a:solidFill>
                 <a:latin typeface="Amiri" pitchFamily="2" charset="-78"/>
+                <a:ea typeface="Amiri" pitchFamily="2" charset="-78"/>
                 <a:cs typeface="Amiri" pitchFamily="2" charset="-78"/>
               </a:rPr>
               <a:t>وُلِدْتُ فِي …</a:t>
@@ -15989,6 +16114,7 @@
                   <a:srgbClr val="1B3B6F"/>
                 </a:solidFill>
                 <a:latin typeface="Amiri" pitchFamily="2" charset="-78"/>
+                <a:ea typeface="Amiri" pitchFamily="2" charset="-78"/>
                 <a:cs typeface="Amiri" pitchFamily="2" charset="-78"/>
               </a:rPr>
               <a:t>أَيْنَ وُلِدْتَ؟</a:t>
@@ -16157,6 +16283,7 @@
                   <a:srgbClr val="1B3B6F"/>
                 </a:solidFill>
                 <a:latin typeface="Amiri" pitchFamily="2" charset="-78"/>
+                <a:ea typeface="Amiri" pitchFamily="2" charset="-78"/>
                 <a:cs typeface="Amiri" pitchFamily="2" charset="-78"/>
               </a:rPr>
               <a:t>أَنَا … / أَنَا … وَأَصْلِي مِنْ …</a:t>
@@ -16233,6 +16360,7 @@
                   <a:srgbClr val="1B3B6F"/>
                 </a:solidFill>
                 <a:latin typeface="Amiri" pitchFamily="2" charset="-78"/>
+                <a:ea typeface="Amiri" pitchFamily="2" charset="-78"/>
                 <a:cs typeface="Amiri" pitchFamily="2" charset="-78"/>
               </a:rPr>
               <a:t>مَا جِنْسِيَّتُكَ؟</a:t>
@@ -16401,6 +16529,7 @@
                   <a:srgbClr val="1B3B6F"/>
                 </a:solidFill>
                 <a:latin typeface="Amiri" pitchFamily="2" charset="-78"/>
+                <a:ea typeface="Amiri" pitchFamily="2" charset="-78"/>
                 <a:cs typeface="Amiri" pitchFamily="2" charset="-78"/>
               </a:rPr>
               <a:t>أَتَكَلَّمُ … وَ…</a:t>
@@ -16477,6 +16606,7 @@
                   <a:srgbClr val="1B3B6F"/>
                 </a:solidFill>
                 <a:latin typeface="Amiri" pitchFamily="2" charset="-78"/>
+                <a:ea typeface="Amiri" pitchFamily="2" charset="-78"/>
                 <a:cs typeface="Amiri" pitchFamily="2" charset="-78"/>
               </a:rPr>
               <a:t>أَيَّ لُغَاتٍ تَتَكَلَّمُ؟</a:t>
@@ -16645,6 +16775,7 @@
                   <a:srgbClr val="1B3B6F"/>
                 </a:solidFill>
                 <a:latin typeface="Amiri" pitchFamily="2" charset="-78"/>
+                <a:ea typeface="Amiri" pitchFamily="2" charset="-78"/>
                 <a:cs typeface="Amiri" pitchFamily="2" charset="-78"/>
               </a:rPr>
               <a:t>أَنَا … وَ…</a:t>
@@ -16721,6 +16852,7 @@
                   <a:srgbClr val="1B3B6F"/>
                 </a:solidFill>
                 <a:latin typeface="Amiri" pitchFamily="2" charset="-78"/>
+                <a:ea typeface="Amiri" pitchFamily="2" charset="-78"/>
                 <a:cs typeface="Amiri" pitchFamily="2" charset="-78"/>
               </a:rPr>
               <a:t>صِفْ نَفْسَكَ بِكَلِمَتَيْنِ.</a:t>
@@ -16875,6 +17007,7 @@
                   <a:srgbClr val="1B3B6F"/>
                 </a:solidFill>
                 <a:latin typeface="Amiri" pitchFamily="2" charset="-78"/>
+                <a:ea typeface="Amiri" pitchFamily="2" charset="-78"/>
                 <a:cs typeface="Amiri" pitchFamily="2" charset="-78"/>
               </a:rPr>
               <a:t>عَفْوًا، هَلْ يُمْكِنُ أَنْ تُعِيدَ السُّؤَالَ؟</a:t>
@@ -17008,6 +17141,7 @@
                   <a:srgbClr val="D4AF37"/>
                 </a:solidFill>
                 <a:latin typeface="Amiri" pitchFamily="2" charset="-78"/>
+                <a:ea typeface="Amiri" pitchFamily="2" charset="-78"/>
                 <a:cs typeface="Amiri" pitchFamily="2" charset="-78"/>
               </a:rPr>
               <a:t>م</a:t>
@@ -17328,6 +17462,7 @@
                   <a:srgbClr val="8A6D1E"/>
                 </a:solidFill>
                 <a:latin typeface="Amiri" pitchFamily="2" charset="-78"/>
+                <a:ea typeface="Amiri" pitchFamily="2" charset="-78"/>
                 <a:cs typeface="Amiri" pitchFamily="2" charset="-78"/>
               </a:rPr>
               <a:t>هُوِيَّتِي</a:t>
@@ -17608,6 +17743,7 @@
                   <a:srgbClr val="1B3B6F"/>
                 </a:solidFill>
                 <a:latin typeface="Amiri" pitchFamily="2" charset="-78"/>
+                <a:ea typeface="Amiri" pitchFamily="2" charset="-78"/>
                 <a:cs typeface="Amiri" pitchFamily="2" charset="-78"/>
               </a:rPr>
               <a:t>أَسْكُنُ فِي … وَهِيَ … فِيهَا …</a:t>
@@ -17684,6 +17820,7 @@
                   <a:srgbClr val="1B3B6F"/>
                 </a:solidFill>
                 <a:latin typeface="Amiri" pitchFamily="2" charset="-78"/>
+                <a:ea typeface="Amiri" pitchFamily="2" charset="-78"/>
                 <a:cs typeface="Amiri" pitchFamily="2" charset="-78"/>
               </a:rPr>
               <a:t>حَدِّثْنَا عَنْ مَدِينَتِكَ.</a:t>
@@ -17787,6 +17924,7 @@
                   <a:srgbClr val="1B3B6F"/>
                 </a:solidFill>
                 <a:latin typeface="Amiri" pitchFamily="2" charset="-78"/>
+                <a:ea typeface="Amiri" pitchFamily="2" charset="-78"/>
                 <a:cs typeface="Amiri" pitchFamily="2" charset="-78"/>
               </a:rPr>
               <a:t>بَدَأْتُ … لِأَنَّ …</a:t>
@@ -17863,6 +18001,7 @@
                   <a:srgbClr val="1B3B6F"/>
                 </a:solidFill>
                 <a:latin typeface="Amiri" pitchFamily="2" charset="-78"/>
+                <a:ea typeface="Amiri" pitchFamily="2" charset="-78"/>
                 <a:cs typeface="Amiri" pitchFamily="2" charset="-78"/>
               </a:rPr>
               <a:t>مَتَى بَدَأْتَ تَتَعَلَّمُ العَرَبِيَّةَ؟ وَلِمَاذَا؟</a:t>
@@ -17966,6 +18105,7 @@
                   <a:srgbClr val="1B3B6F"/>
                 </a:solidFill>
                 <a:latin typeface="Amiri" pitchFamily="2" charset="-78"/>
+                <a:ea typeface="Amiri" pitchFamily="2" charset="-78"/>
                 <a:cs typeface="Amiri" pitchFamily="2" charset="-78"/>
               </a:rPr>
               <a:t>أَهَمُّ شَخْصٍ هُوَ / هِيَ … لِأَنَّ …</a:t>
@@ -18042,6 +18182,7 @@
                   <a:srgbClr val="1B3B6F"/>
                 </a:solidFill>
                 <a:latin typeface="Amiri" pitchFamily="2" charset="-78"/>
+                <a:ea typeface="Amiri" pitchFamily="2" charset="-78"/>
                 <a:cs typeface="Amiri" pitchFamily="2" charset="-78"/>
               </a:rPr>
               <a:t>مَنْ أَهَمُّ شَخْصٍ فِي حَيَاتِكَ؟</a:t>
@@ -18145,6 +18286,7 @@
                   <a:srgbClr val="1B3B6F"/>
                 </a:solidFill>
                 <a:latin typeface="Amiri" pitchFamily="2" charset="-78"/>
+                <a:ea typeface="Amiri" pitchFamily="2" charset="-78"/>
                 <a:cs typeface="Amiri" pitchFamily="2" charset="-78"/>
               </a:rPr>
               <a:t>أَكْتُبُ … وَلَا أَكْتُبُ …</a:t>
@@ -18221,6 +18363,7 @@
                   <a:srgbClr val="1B3B6F"/>
                 </a:solidFill>
                 <a:latin typeface="Amiri" pitchFamily="2" charset="-78"/>
+                <a:ea typeface="Amiri" pitchFamily="2" charset="-78"/>
                 <a:cs typeface="Amiri" pitchFamily="2" charset="-78"/>
               </a:rPr>
               <a:t>كَيْفَ تُعَرِّفُ نَفْسَكَ عَلَى الإِنْتَرْنِتِ؟</a:t>
@@ -18324,6 +18467,7 @@
                   <a:srgbClr val="1B3B6F"/>
                 </a:solidFill>
                 <a:latin typeface="Amiri" pitchFamily="2" charset="-78"/>
+                <a:ea typeface="Amiri" pitchFamily="2" charset="-78"/>
                 <a:cs typeface="Amiri" pitchFamily="2" charset="-78"/>
               </a:rPr>
               <a:t>كُنْتُ … أَمَّا الآنَ فَأَنَا …</a:t>
@@ -18400,6 +18544,7 @@
                   <a:srgbClr val="1B3B6F"/>
                 </a:solidFill>
                 <a:latin typeface="Amiri" pitchFamily="2" charset="-78"/>
+                <a:ea typeface="Amiri" pitchFamily="2" charset="-78"/>
                 <a:cs typeface="Amiri" pitchFamily="2" charset="-78"/>
               </a:rPr>
               <a:t>كَيْفَ تَغَيَّرْتَ مُنْذُ كُنْتَ صَغِيرًا؟</a:t>
@@ -18609,6 +18754,7 @@
                   <a:srgbClr val="D4AF37"/>
                 </a:solidFill>
                 <a:latin typeface="Amiri" pitchFamily="2" charset="-78"/>
+                <a:ea typeface="Amiri" pitchFamily="2" charset="-78"/>
                 <a:cs typeface="Amiri" pitchFamily="2" charset="-78"/>
               </a:rPr>
               <a:t>م</a:t>
@@ -18929,6 +19075,7 @@
                   <a:srgbClr val="8A6D1E"/>
                 </a:solidFill>
                 <a:latin typeface="Amiri" pitchFamily="2" charset="-78"/>
+                <a:ea typeface="Amiri" pitchFamily="2" charset="-78"/>
                 <a:cs typeface="Amiri" pitchFamily="2" charset="-78"/>
               </a:rPr>
               <a:t>الهُوِيَّةُ وَالمُجْتَمَعُ</a:t>
@@ -19209,6 +19356,7 @@
                   <a:srgbClr val="1B3B6F"/>
                 </a:solidFill>
                 <a:latin typeface="Amiri" pitchFamily="2" charset="-78"/>
+                <a:ea typeface="Amiri" pitchFamily="2" charset="-78"/>
                 <a:cs typeface="Amiri" pitchFamily="2" charset="-78"/>
               </a:rPr>
               <a:t>أَعْتَقِدُ أَنَّ … أَهَمُّ مِنْ …</a:t>
@@ -19285,6 +19433,7 @@
                   <a:srgbClr val="1B3B6F"/>
                 </a:solidFill>
                 <a:latin typeface="Amiri" pitchFamily="2" charset="-78"/>
+                <a:ea typeface="Amiri" pitchFamily="2" charset="-78"/>
                 <a:cs typeface="Amiri" pitchFamily="2" charset="-78"/>
               </a:rPr>
               <a:t>مَا الَّذِي يَصْنَعُ هُوِيَّةَ الإِنْسَانِ فِي رَأْيِكَ؟</a:t>
@@ -19388,6 +19537,7 @@
                   <a:srgbClr val="1B3B6F"/>
                 </a:solidFill>
                 <a:latin typeface="Amiri" pitchFamily="2" charset="-78"/>
+                <a:ea typeface="Amiri" pitchFamily="2" charset="-78"/>
                 <a:cs typeface="Amiri" pitchFamily="2" charset="-78"/>
               </a:rPr>
               <a:t>نَعَمْ، فَأَنَا مَثَلًا …</a:t>
@@ -19464,6 +19614,7 @@
                   <a:srgbClr val="1B3B6F"/>
                 </a:solidFill>
                 <a:latin typeface="Amiri" pitchFamily="2" charset="-78"/>
+                <a:ea typeface="Amiri" pitchFamily="2" charset="-78"/>
                 <a:cs typeface="Amiri" pitchFamily="2" charset="-78"/>
               </a:rPr>
               <a:t>هَلْ يُمْكِنُ أَنْ يَكُونَ لِلْإِنْسَانِ هُوِيَّتَانِ؟</a:t>
@@ -19567,6 +19718,7 @@
                   <a:srgbClr val="1B3B6F"/>
                 </a:solidFill>
                 <a:latin typeface="Amiri" pitchFamily="2" charset="-78"/>
+                <a:ea typeface="Amiri" pitchFamily="2" charset="-78"/>
                 <a:cs typeface="Amiri" pitchFamily="2" charset="-78"/>
               </a:rPr>
               <a:t>صَحِيحٌ أَنَّ … غَيْرَ أَنَّ …</a:t>
@@ -19643,6 +19795,7 @@
                   <a:srgbClr val="1B3B6F"/>
                 </a:solidFill>
                 <a:latin typeface="Amiri" pitchFamily="2" charset="-78"/>
+                <a:ea typeface="Amiri" pitchFamily="2" charset="-78"/>
                 <a:cs typeface="Amiri" pitchFamily="2" charset="-78"/>
               </a:rPr>
               <a:t>هَلْ تُعْطِي وَسَائِلُ التَّوَاصُلِ صُورَةً حَقِيقِيَّةً عَنَّا؟</a:t>
@@ -19746,6 +19899,7 @@
                   <a:srgbClr val="1B3B6F"/>
                 </a:solidFill>
                 <a:latin typeface="Amiri" pitchFamily="2" charset="-78"/>
+                <a:ea typeface="Amiri" pitchFamily="2" charset="-78"/>
                 <a:cs typeface="Amiri" pitchFamily="2" charset="-78"/>
               </a:rPr>
               <a:t>كَانَ أَبِي … أَمَّا أَنَا فَأَعِيشُ …</a:t>
@@ -19822,6 +19976,7 @@
                   <a:srgbClr val="1B3B6F"/>
                 </a:solidFill>
                 <a:latin typeface="Amiri" pitchFamily="2" charset="-78"/>
+                <a:ea typeface="Amiri" pitchFamily="2" charset="-78"/>
                 <a:cs typeface="Amiri" pitchFamily="2" charset="-78"/>
               </a:rPr>
               <a:t>كَيْفَ كَانَتْ حَيَاةُ وَالِدَيْكَ عِنْدَمَا كَانَا فِي عُمْرِكَ؟</a:t>
@@ -19925,6 +20080,7 @@
                   <a:srgbClr val="1B3B6F"/>
                 </a:solidFill>
                 <a:latin typeface="Amiri" pitchFamily="2" charset="-78"/>
+                <a:ea typeface="Amiri" pitchFamily="2" charset="-78"/>
                 <a:cs typeface="Amiri" pitchFamily="2" charset="-78"/>
               </a:rPr>
               <a:t>لَوْ وُلِدْتُ فِي …، لَتَكَلَّمْتُ …</a:t>
@@ -20001,6 +20157,7 @@
                   <a:srgbClr val="1B3B6F"/>
                 </a:solidFill>
                 <a:latin typeface="Amiri" pitchFamily="2" charset="-78"/>
+                <a:ea typeface="Amiri" pitchFamily="2" charset="-78"/>
                 <a:cs typeface="Amiri" pitchFamily="2" charset="-78"/>
               </a:rPr>
               <a:t>لَوْ وُلِدْتَ فِي بَلَدٍ آخَرَ، كَيْفَ تَكُونُ حَيَاتُكَ؟</a:t>
@@ -20210,6 +20367,7 @@
                   <a:srgbClr val="D4AF37"/>
                 </a:solidFill>
                 <a:latin typeface="Amiri" pitchFamily="2" charset="-78"/>
+                <a:ea typeface="Amiri" pitchFamily="2" charset="-78"/>
                 <a:cs typeface="Amiri" pitchFamily="2" charset="-78"/>
               </a:rPr>
               <a:t>م</a:t>
@@ -20530,6 +20688,7 @@
                   <a:srgbClr val="8A6D1E"/>
                 </a:solidFill>
                 <a:latin typeface="Amiri" pitchFamily="2" charset="-78"/>
+                <a:ea typeface="Amiri" pitchFamily="2" charset="-78"/>
                 <a:cs typeface="Amiri" pitchFamily="2" charset="-78"/>
               </a:rPr>
               <a:t>آدَابُ الصَّفِّ</a:t>
@@ -22061,6 +22220,7 @@
                   <a:srgbClr val="D4AF37"/>
                 </a:solidFill>
                 <a:latin typeface="Amiri" pitchFamily="2" charset="-78"/>
+                <a:ea typeface="Amiri" pitchFamily="2" charset="-78"/>
                 <a:cs typeface="Amiri" pitchFamily="2" charset="-78"/>
               </a:rPr>
               <a:t>م</a:t>
@@ -22381,6 +22541,7 @@
                   <a:srgbClr val="8A6D1E"/>
                 </a:solidFill>
                 <a:latin typeface="Amiri" pitchFamily="2" charset="-78"/>
+                <a:ea typeface="Amiri" pitchFamily="2" charset="-78"/>
                 <a:cs typeface="Amiri" pitchFamily="2" charset="-78"/>
               </a:rPr>
               <a:t>نَمُوذَجُ الإِجَابَةِ</a:t>
@@ -22623,6 +22784,7 @@
                   <a:srgbClr val="1B3B6F"/>
                 </a:solidFill>
                 <a:latin typeface="Amiri" pitchFamily="2" charset="-78"/>
+                <a:ea typeface="Amiri" pitchFamily="2" charset="-78"/>
                 <a:cs typeface="Amiri" pitchFamily="2" charset="-78"/>
               </a:rPr>
               <a:t>اسْمِي زَيْنَبُ، وَعُمْرِي أَرْبَعَ عَشْرَةَ سَنَةً.</a:t>
@@ -22699,6 +22861,7 @@
                   <a:srgbClr val="1B3B6F"/>
                 </a:solidFill>
                 <a:latin typeface="Amiri" pitchFamily="2" charset="-78"/>
+                <a:ea typeface="Amiri" pitchFamily="2" charset="-78"/>
                 <a:cs typeface="Amiri" pitchFamily="2" charset="-78"/>
               </a:rPr>
               <a:t>مَا اسْمُكَ؟ وَكَمْ عُمْرُكَ؟</a:t>
@@ -22802,6 +22965,7 @@
                   <a:srgbClr val="1B3B6F"/>
                 </a:solidFill>
                 <a:latin typeface="Amiri" pitchFamily="2" charset="-78"/>
+                <a:ea typeface="Amiri" pitchFamily="2" charset="-78"/>
                 <a:cs typeface="Amiri" pitchFamily="2" charset="-78"/>
               </a:rPr>
               <a:t>وُلِدْتُ فِي لِيدْزَ، فِي شَمَالِ إِنْجِلْتِرَا.</a:t>
@@ -22878,6 +23042,7 @@
                   <a:srgbClr val="1B3B6F"/>
                 </a:solidFill>
                 <a:latin typeface="Amiri" pitchFamily="2" charset="-78"/>
+                <a:ea typeface="Amiri" pitchFamily="2" charset="-78"/>
                 <a:cs typeface="Amiri" pitchFamily="2" charset="-78"/>
               </a:rPr>
               <a:t>أَيْنَ وُلِدْتَ؟</a:t>
@@ -22981,6 +23146,7 @@
                   <a:srgbClr val="1B3B6F"/>
                 </a:solidFill>
                 <a:latin typeface="Amiri" pitchFamily="2" charset="-78"/>
+                <a:ea typeface="Amiri" pitchFamily="2" charset="-78"/>
                 <a:cs typeface="Amiri" pitchFamily="2" charset="-78"/>
               </a:rPr>
               <a:t>أَنَا بِرِيطَانِيَّةٌ، وَأَصْلِي مِنْ بَاكِسْتَانَ.</a:t>
@@ -23057,6 +23223,7 @@
                   <a:srgbClr val="1B3B6F"/>
                 </a:solidFill>
                 <a:latin typeface="Amiri" pitchFamily="2" charset="-78"/>
+                <a:ea typeface="Amiri" pitchFamily="2" charset="-78"/>
                 <a:cs typeface="Amiri" pitchFamily="2" charset="-78"/>
               </a:rPr>
               <a:t>مَا جِنْسِيَّتُكَ؟</a:t>
@@ -23160,6 +23327,7 @@
                   <a:srgbClr val="1B3B6F"/>
                 </a:solidFill>
                 <a:latin typeface="Amiri" pitchFamily="2" charset="-78"/>
+                <a:ea typeface="Amiri" pitchFamily="2" charset="-78"/>
                 <a:cs typeface="Amiri" pitchFamily="2" charset="-78"/>
               </a:rPr>
               <a:t>أَتَكَلَّمُ الإِنْجِلِيزِيَّةَ وَالأُرْدِيَّةَ، وَأَتَعَلَّمُ العَرَبِيَّةَ.</a:t>
@@ -23236,6 +23404,7 @@
                   <a:srgbClr val="1B3B6F"/>
                 </a:solidFill>
                 <a:latin typeface="Amiri" pitchFamily="2" charset="-78"/>
+                <a:ea typeface="Amiri" pitchFamily="2" charset="-78"/>
                 <a:cs typeface="Amiri" pitchFamily="2" charset="-78"/>
               </a:rPr>
               <a:t>أَيَّ لُغَاتٍ تَتَكَلَّمُ؟</a:t>
@@ -23339,6 +23508,7 @@
                   <a:srgbClr val="1B3B6F"/>
                 </a:solidFill>
                 <a:latin typeface="Amiri" pitchFamily="2" charset="-78"/>
+                <a:ea typeface="Amiri" pitchFamily="2" charset="-78"/>
                 <a:cs typeface="Amiri" pitchFamily="2" charset="-78"/>
               </a:rPr>
               <a:t>أَنَا نَشِيطَةٌ وَمَرِحَةٌ.</a:t>
@@ -23415,6 +23585,7 @@
                   <a:srgbClr val="1B3B6F"/>
                 </a:solidFill>
                 <a:latin typeface="Amiri" pitchFamily="2" charset="-78"/>
+                <a:ea typeface="Amiri" pitchFamily="2" charset="-78"/>
                 <a:cs typeface="Amiri" pitchFamily="2" charset="-78"/>
               </a:rPr>
               <a:t>صِفْ نَفْسَكَ بِكَلِمَتَيْنِ.</a:t>
@@ -23624,6 +23795,7 @@
                   <a:srgbClr val="D4AF37"/>
                 </a:solidFill>
                 <a:latin typeface="Amiri" pitchFamily="2" charset="-78"/>
+                <a:ea typeface="Amiri" pitchFamily="2" charset="-78"/>
                 <a:cs typeface="Amiri" pitchFamily="2" charset="-78"/>
               </a:rPr>
               <a:t>م</a:t>
@@ -23944,6 +24116,7 @@
                   <a:srgbClr val="8A6D1E"/>
                 </a:solidFill>
                 <a:latin typeface="Amiri" pitchFamily="2" charset="-78"/>
+                <a:ea typeface="Amiri" pitchFamily="2" charset="-78"/>
                 <a:cs typeface="Amiri" pitchFamily="2" charset="-78"/>
               </a:rPr>
               <a:t>نَمُوذَجُ الإِجَابَةِ</a:t>
@@ -24186,6 +24359,7 @@
                   <a:srgbClr val="1B3B6F"/>
                 </a:solidFill>
                 <a:latin typeface="Amiri" pitchFamily="2" charset="-78"/>
+                <a:ea typeface="Amiri" pitchFamily="2" charset="-78"/>
                 <a:cs typeface="Amiri" pitchFamily="2" charset="-78"/>
               </a:rPr>
               <a:t>أَسْكُنُ فِي بِرِسْتُولَ، وَهِيَ مَدِينَةٌ كَبِيرَةٌ وَجَمِيلَةٌ، فِيهَا نَهْرٌ وَجُسُورٌ قَدِيمَةٌ.</a:t>
@@ -24262,6 +24436,7 @@
                   <a:srgbClr val="1B3B6F"/>
                 </a:solidFill>
                 <a:latin typeface="Amiri" pitchFamily="2" charset="-78"/>
+                <a:ea typeface="Amiri" pitchFamily="2" charset="-78"/>
                 <a:cs typeface="Amiri" pitchFamily="2" charset="-78"/>
               </a:rPr>
               <a:t>حَدِّثْنَا عَنْ مَدِينَتِكَ.</a:t>
@@ -24365,6 +24540,7 @@
                   <a:srgbClr val="1B3B6F"/>
                 </a:solidFill>
                 <a:latin typeface="Amiri" pitchFamily="2" charset="-78"/>
+                <a:ea typeface="Amiri" pitchFamily="2" charset="-78"/>
                 <a:cs typeface="Amiri" pitchFamily="2" charset="-78"/>
               </a:rPr>
               <a:t>بَدَأْتُ قَبْلَ ثَلَاثِ سَنَوَاتٍ، لِأَنِّي أُرِيدُ أَنْ أَفْهَمَ القُرْآنَ وَأَتَكَلَّمَ مَعَ أَقَارِبِي.</a:t>
@@ -24441,6 +24617,7 @@
                   <a:srgbClr val="1B3B6F"/>
                 </a:solidFill>
                 <a:latin typeface="Amiri" pitchFamily="2" charset="-78"/>
+                <a:ea typeface="Amiri" pitchFamily="2" charset="-78"/>
                 <a:cs typeface="Amiri" pitchFamily="2" charset="-78"/>
               </a:rPr>
               <a:t>مَتَى بَدَأْتَ تَتَعَلَّمُ العَرَبِيَّةَ؟ وَلِمَاذَا؟</a:t>
@@ -24544,6 +24721,7 @@
                   <a:srgbClr val="1B3B6F"/>
                 </a:solidFill>
                 <a:latin typeface="Amiri" pitchFamily="2" charset="-78"/>
+                <a:ea typeface="Amiri" pitchFamily="2" charset="-78"/>
                 <a:cs typeface="Amiri" pitchFamily="2" charset="-78"/>
               </a:rPr>
               <a:t>أَهَمُّ شَخْصٍ هِيَ أُمِّي، لِأَنَّهَا تُسَاعِدُنِي دَائِمًا وَتُشَجِّعُنِي.</a:t>
@@ -24620,6 +24798,7 @@
                   <a:srgbClr val="1B3B6F"/>
                 </a:solidFill>
                 <a:latin typeface="Amiri" pitchFamily="2" charset="-78"/>
+                <a:ea typeface="Amiri" pitchFamily="2" charset="-78"/>
                 <a:cs typeface="Amiri" pitchFamily="2" charset="-78"/>
               </a:rPr>
               <a:t>مَنْ أَهَمُّ شَخْصٍ فِي حَيَاتِكَ؟</a:t>
@@ -24723,6 +24902,7 @@
                   <a:srgbClr val="1B3B6F"/>
                 </a:solidFill>
                 <a:latin typeface="Amiri" pitchFamily="2" charset="-78"/>
+                <a:ea typeface="Amiri" pitchFamily="2" charset="-78"/>
                 <a:cs typeface="Amiri" pitchFamily="2" charset="-78"/>
               </a:rPr>
               <a:t>أَكْتُبُ اسْمِيَ الأَوَّلَ وَهِوَايَاتِي فَقَطْ، وَلَا أَكْتُبُ عُنْوَانِي، لِأَنَّ ذٰلِكَ خَطِيرٌ.</a:t>
@@ -24799,6 +24979,7 @@
                   <a:srgbClr val="1B3B6F"/>
                 </a:solidFill>
                 <a:latin typeface="Amiri" pitchFamily="2" charset="-78"/>
+                <a:ea typeface="Amiri" pitchFamily="2" charset="-78"/>
                 <a:cs typeface="Amiri" pitchFamily="2" charset="-78"/>
               </a:rPr>
               <a:t>كَيْفَ تُعَرِّفُ نَفْسَكَ عَلَى الإِنْتَرْنِتِ؟</a:t>
@@ -24902,6 +25083,7 @@
                   <a:srgbClr val="1B3B6F"/>
                 </a:solidFill>
                 <a:latin typeface="Amiri" pitchFamily="2" charset="-78"/>
+                <a:ea typeface="Amiri" pitchFamily="2" charset="-78"/>
                 <a:cs typeface="Amiri" pitchFamily="2" charset="-78"/>
               </a:rPr>
               <a:t>كُنْتُ خَجُولًا جِدًّا، أَمَّا الآنَ فَأَنَا أَكْثَرُ ثِقَةً، وَأَتَكَلَّمُ أَمَامَ الصَّفِّ.</a:t>
@@ -24978,6 +25160,7 @@
                   <a:srgbClr val="1B3B6F"/>
                 </a:solidFill>
                 <a:latin typeface="Amiri" pitchFamily="2" charset="-78"/>
+                <a:ea typeface="Amiri" pitchFamily="2" charset="-78"/>
                 <a:cs typeface="Amiri" pitchFamily="2" charset="-78"/>
               </a:rPr>
               <a:t>كَيْفَ تَغَيَّرْتَ مُنْذُ كُنْتَ صَغِيرًا؟</a:t>
@@ -25187,6 +25370,7 @@
                   <a:srgbClr val="D4AF37"/>
                 </a:solidFill>
                 <a:latin typeface="Amiri" pitchFamily="2" charset="-78"/>
+                <a:ea typeface="Amiri" pitchFamily="2" charset="-78"/>
                 <a:cs typeface="Amiri" pitchFamily="2" charset="-78"/>
               </a:rPr>
               <a:t>م</a:t>
@@ -25507,6 +25691,7 @@
                   <a:srgbClr val="8A6D1E"/>
                 </a:solidFill>
                 <a:latin typeface="Amiri" pitchFamily="2" charset="-78"/>
+                <a:ea typeface="Amiri" pitchFamily="2" charset="-78"/>
                 <a:cs typeface="Amiri" pitchFamily="2" charset="-78"/>
               </a:rPr>
               <a:t>نَمُوذَجُ الإِجَابَةِ</a:t>
@@ -25749,6 +25934,7 @@
                   <a:srgbClr val="1B3B6F"/>
                 </a:solidFill>
                 <a:latin typeface="Amiri" pitchFamily="2" charset="-78"/>
+                <a:ea typeface="Amiri" pitchFamily="2" charset="-78"/>
                 <a:cs typeface="Amiri" pitchFamily="2" charset="-78"/>
               </a:rPr>
               <a:t>أَعْتَقِدُ أَنَّ القِيَمَ وَاللُّغَةَ أَهَمُّ مِنَ المَكَانِ الَّذِي وُلِدْنَا فِيهِ، لِأَنَّهَا تَبْقَى مَعَنَا أَيْنَمَا ذَهَبْنَا.</a:t>
@@ -25825,6 +26011,7 @@
                   <a:srgbClr val="1B3B6F"/>
                 </a:solidFill>
                 <a:latin typeface="Amiri" pitchFamily="2" charset="-78"/>
+                <a:ea typeface="Amiri" pitchFamily="2" charset="-78"/>
                 <a:cs typeface="Amiri" pitchFamily="2" charset="-78"/>
               </a:rPr>
               <a:t>مَا الَّذِي يَصْنَعُ هُوِيَّةَ الإِنْسَانِ فِي رَأْيِكَ؟</a:t>
@@ -25928,6 +26115,7 @@
                   <a:srgbClr val="1B3B6F"/>
                 </a:solidFill>
                 <a:latin typeface="Amiri" pitchFamily="2" charset="-78"/>
+                <a:ea typeface="Amiri" pitchFamily="2" charset="-78"/>
                 <a:cs typeface="Amiri" pitchFamily="2" charset="-78"/>
               </a:rPr>
               <a:t>نَعَمْ، فَأَنَا مَثَلًا أُشَجِّعُ المُنْتَخَبَ الإِنْجِلِيزِيَّ، وَأَطْبُخُ مَعَ أُمِّي الأَكْلَ السُّودَانِيَّ، وَلَا أَرَى تَنَاقُضًا فِي ذٰلِكَ.</a:t>
@@ -26004,6 +26192,7 @@
                   <a:srgbClr val="1B3B6F"/>
                 </a:solidFill>
                 <a:latin typeface="Amiri" pitchFamily="2" charset="-78"/>
+                <a:ea typeface="Amiri" pitchFamily="2" charset="-78"/>
                 <a:cs typeface="Amiri" pitchFamily="2" charset="-78"/>
               </a:rPr>
               <a:t>هَلْ يُمْكِنُ أَنْ يَكُونَ لِلْإِنْسَانِ هُوِيَّتَانِ؟</a:t>
@@ -26107,6 +26296,7 @@
                   <a:srgbClr val="1B3B6F"/>
                 </a:solidFill>
                 <a:latin typeface="Amiri" pitchFamily="2" charset="-78"/>
+                <a:ea typeface="Amiri" pitchFamily="2" charset="-78"/>
                 <a:cs typeface="Amiri" pitchFamily="2" charset="-78"/>
               </a:rPr>
               <a:t>صَحِيحٌ أَنَّهَا تُظْهِرُ جُزْءًا مِنْ حَيَاتِنَا، غَيْرَ أَنَّ النَّاسَ يَنْشُرُونَ أَجْمَلَ اللَّحَظَاتِ فَقَطْ، فَتَبْدُو حَيَاتُهُمْ مِثَالِيَّةً.</a:t>
@@ -26183,6 +26373,7 @@
                   <a:srgbClr val="1B3B6F"/>
                 </a:solidFill>
                 <a:latin typeface="Amiri" pitchFamily="2" charset="-78"/>
+                <a:ea typeface="Amiri" pitchFamily="2" charset="-78"/>
                 <a:cs typeface="Amiri" pitchFamily="2" charset="-78"/>
               </a:rPr>
               <a:t>هَلْ تُعْطِي وَسَائِلُ التَّوَاصُلِ صُورَةً حَقِيقِيَّةً عَنَّا؟</a:t>
@@ -26392,6 +26583,7 @@
                   <a:srgbClr val="D4AF37"/>
                 </a:solidFill>
                 <a:latin typeface="Amiri" pitchFamily="2" charset="-78"/>
+                <a:ea typeface="Amiri" pitchFamily="2" charset="-78"/>
                 <a:cs typeface="Amiri" pitchFamily="2" charset="-78"/>
               </a:rPr>
               <a:t>م</a:t>
@@ -26712,6 +26904,7 @@
                   <a:srgbClr val="8A6D1E"/>
                 </a:solidFill>
                 <a:latin typeface="Amiri" pitchFamily="2" charset="-78"/>
+                <a:ea typeface="Amiri" pitchFamily="2" charset="-78"/>
                 <a:cs typeface="Amiri" pitchFamily="2" charset="-78"/>
               </a:rPr>
               <a:t>نَمُوذَجُ الإِجَابَةِ</a:t>
@@ -26954,6 +27147,7 @@
                   <a:srgbClr val="1B3B6F"/>
                 </a:solidFill>
                 <a:latin typeface="Amiri" pitchFamily="2" charset="-78"/>
+                <a:ea typeface="Amiri" pitchFamily="2" charset="-78"/>
                 <a:cs typeface="Amiri" pitchFamily="2" charset="-78"/>
               </a:rPr>
               <a:t>كَانَ أَبِي يَعِيشُ فِي قَرْيَةٍ صَغِيرَةٍ، وَيُسَاعِدُ جَدِّي فِي المَزْرَعَةِ، أَمَّا أَنَا فَأَعِيشُ فِي مَدِينَةٍ كَبِيرَةٍ، وَأَقْضِي وَقْتِي فِي الدِّرَاسَةِ.</a:t>
@@ -27030,6 +27224,7 @@
                   <a:srgbClr val="1B3B6F"/>
                 </a:solidFill>
                 <a:latin typeface="Amiri" pitchFamily="2" charset="-78"/>
+                <a:ea typeface="Amiri" pitchFamily="2" charset="-78"/>
                 <a:cs typeface="Amiri" pitchFamily="2" charset="-78"/>
               </a:rPr>
               <a:t>كَيْفَ كَانَتْ حَيَاةُ وَالِدَيْكَ عِنْدَمَا كَانَا فِي عُمْرِكَ؟</a:t>
@@ -27133,6 +27328,7 @@
                   <a:srgbClr val="1B3B6F"/>
                 </a:solidFill>
                 <a:latin typeface="Amiri" pitchFamily="2" charset="-78"/>
+                <a:ea typeface="Amiri" pitchFamily="2" charset="-78"/>
                 <a:cs typeface="Amiri" pitchFamily="2" charset="-78"/>
               </a:rPr>
               <a:t>لَوْ وُلِدْتُ فِي المَغْرِبِ، لَتَكَلَّمْتُ العَرَبِيَّةَ وَالفَرَنْسِيَّةَ بِطَلَاقَةٍ، وَلَكَانَ البَحْرُ قَرِيبًا مِنْ بَيْتِي.</a:t>
@@ -27209,6 +27405,7 @@
                   <a:srgbClr val="1B3B6F"/>
                 </a:solidFill>
                 <a:latin typeface="Amiri" pitchFamily="2" charset="-78"/>
+                <a:ea typeface="Amiri" pitchFamily="2" charset="-78"/>
                 <a:cs typeface="Amiri" pitchFamily="2" charset="-78"/>
               </a:rPr>
               <a:t>لَوْ وُلِدْتَ فِي بَلَدٍ آخَرَ، كَيْفَ تَكُونُ حَيَاتُكَ؟</a:t>
@@ -27418,6 +27615,7 @@
                   <a:srgbClr val="D4AF37"/>
                 </a:solidFill>
                 <a:latin typeface="Amiri" pitchFamily="2" charset="-78"/>
+                <a:ea typeface="Amiri" pitchFamily="2" charset="-78"/>
                 <a:cs typeface="Amiri" pitchFamily="2" charset="-78"/>
               </a:rPr>
               <a:t>م</a:t>
@@ -27738,6 +27936,7 @@
                   <a:srgbClr val="8A6D1E"/>
                 </a:solidFill>
                 <a:latin typeface="Amiri" pitchFamily="2" charset="-78"/>
+                <a:ea typeface="Amiri" pitchFamily="2" charset="-78"/>
                 <a:cs typeface="Amiri" pitchFamily="2" charset="-78"/>
               </a:rPr>
               <a:t>قَيِّمْ عَمَلَكَ</a:t>
@@ -28982,6 +29181,7 @@
                   <a:srgbClr val="FFFFFF"/>
                 </a:solidFill>
                 <a:latin typeface="Amiri" pitchFamily="2" charset="-78"/>
+                <a:ea typeface="Amiri" pitchFamily="2" charset="-78"/>
                 <a:cs typeface="Amiri" pitchFamily="2" charset="-78"/>
               </a:rPr>
               <a:t>أَحْسَنْتُمْ! إِلَى اللِّقَاءِ</a:t>
@@ -29134,6 +29334,7 @@
                   <a:srgbClr val="D4AF37"/>
                 </a:solidFill>
                 <a:latin typeface="Amiri" pitchFamily="2" charset="-78"/>
+                <a:ea typeface="Amiri" pitchFamily="2" charset="-78"/>
                 <a:cs typeface="Amiri" pitchFamily="2" charset="-78"/>
               </a:rPr>
               <a:t>وَرْشَةُ الكِتَابَةِ</a:t>
@@ -29267,6 +29468,7 @@
                   <a:srgbClr val="D4AF37"/>
                 </a:solidFill>
                 <a:latin typeface="Amiri" pitchFamily="2" charset="-78"/>
+                <a:ea typeface="Amiri" pitchFamily="2" charset="-78"/>
                 <a:cs typeface="Amiri" pitchFamily="2" charset="-78"/>
               </a:rPr>
               <a:t>م</a:t>
@@ -29587,6 +29789,7 @@
                   <a:srgbClr val="8A6D1E"/>
                 </a:solidFill>
                 <a:latin typeface="Amiri" pitchFamily="2" charset="-78"/>
+                <a:ea typeface="Amiri" pitchFamily="2" charset="-78"/>
                 <a:cs typeface="Amiri" pitchFamily="2" charset="-78"/>
               </a:rPr>
               <a:t>خَرِيطَةُ الوَرْشَةِ</a:t>
@@ -29901,6 +30104,7 @@
                   <a:srgbClr val="1B3B6F"/>
                 </a:solidFill>
                 <a:latin typeface="Amiri" pitchFamily="2" charset="-78"/>
+                <a:ea typeface="Amiri" pitchFamily="2" charset="-78"/>
                 <a:cs typeface="Amiri" pitchFamily="2" charset="-78"/>
               </a:rPr>
               <a:t>كَيْفَ</a:t>
@@ -30177,6 +30381,7 @@
                   <a:srgbClr val="1E6B52"/>
                 </a:solidFill>
                 <a:latin typeface="Amiri" pitchFamily="2" charset="-78"/>
+                <a:ea typeface="Amiri" pitchFamily="2" charset="-78"/>
                 <a:cs typeface="Amiri" pitchFamily="2" charset="-78"/>
               </a:rPr>
               <a:t>تَمْثِيلُ الدَّوْرِ</a:t>
@@ -30453,6 +30658,7 @@
                   <a:srgbClr val="8A6D1E"/>
                 </a:solidFill>
                 <a:latin typeface="Amiri" pitchFamily="2" charset="-78"/>
+                <a:ea typeface="Amiri" pitchFamily="2" charset="-78"/>
                 <a:cs typeface="Amiri" pitchFamily="2" charset="-78"/>
               </a:rPr>
               <a:t>النَّمُوذَجُ</a:t>
@@ -30729,6 +30935,7 @@
                   <a:srgbClr val="1E6B52"/>
                 </a:solidFill>
                 <a:latin typeface="Amiri" pitchFamily="2" charset="-78"/>
+                <a:ea typeface="Amiri" pitchFamily="2" charset="-78"/>
                 <a:cs typeface="Amiri" pitchFamily="2" charset="-78"/>
               </a:rPr>
               <a:t>المُحَادَثَةُ</a:t>
@@ -31005,6 +31212,7 @@
                   <a:srgbClr val="8A6D1E"/>
                 </a:solidFill>
                 <a:latin typeface="Amiri" pitchFamily="2" charset="-78"/>
+                <a:ea typeface="Amiri" pitchFamily="2" charset="-78"/>
                 <a:cs typeface="Amiri" pitchFamily="2" charset="-78"/>
               </a:rPr>
               <a:t>قَيِّمْ</a:t>
@@ -31248,6 +31456,7 @@
                   <a:srgbClr val="D4AF37"/>
                 </a:solidFill>
                 <a:latin typeface="Amiri" pitchFamily="2" charset="-78"/>
+                <a:ea typeface="Amiri" pitchFamily="2" charset="-78"/>
                 <a:cs typeface="Amiri" pitchFamily="2" charset="-78"/>
               </a:rPr>
               <a:t>م</a:t>
@@ -31568,6 +31777,7 @@
                   <a:srgbClr val="8A6D1E"/>
                 </a:solidFill>
                 <a:latin typeface="Amiri" pitchFamily="2" charset="-78"/>
+                <a:ea typeface="Amiri" pitchFamily="2" charset="-78"/>
                 <a:cs typeface="Amiri" pitchFamily="2" charset="-78"/>
               </a:rPr>
               <a:t>امْتِحَانُ التَّحَدُّثِ</a:t>
@@ -32192,6 +32402,7 @@
                   <a:srgbClr val="1B3B6F"/>
                 </a:solidFill>
                 <a:latin typeface="Amiri" pitchFamily="2" charset="-78"/>
+                <a:ea typeface="Amiri" pitchFamily="2" charset="-78"/>
                 <a:cs typeface="Amiri" pitchFamily="2" charset="-78"/>
               </a:rPr>
               <a:t>عَفْوًا، هَلْ يُمْكِنُ أَنْ تُعِيدَ السُّؤَالَ؟</a:t>
@@ -32291,6 +32502,7 @@
                   <a:srgbClr val="1B3B6F"/>
                 </a:solidFill>
                 <a:latin typeface="Amiri" pitchFamily="2" charset="-78"/>
+                <a:ea typeface="Amiri" pitchFamily="2" charset="-78"/>
                 <a:cs typeface="Amiri" pitchFamily="2" charset="-78"/>
               </a:rPr>
               <a:t>لَحْظَةً، دَعْنِي أُفَكِّرُ …</a:t>
@@ -32390,6 +32602,7 @@
                   <a:srgbClr val="1B3B6F"/>
                 </a:solidFill>
                 <a:latin typeface="Amiri" pitchFamily="2" charset="-78"/>
+                <a:ea typeface="Amiri" pitchFamily="2" charset="-78"/>
                 <a:cs typeface="Amiri" pitchFamily="2" charset="-78"/>
               </a:rPr>
               <a:t>أَقْصِدُ …</a:t>
@@ -32561,6 +32774,7 @@
                   <a:srgbClr val="D4AF37"/>
                 </a:solidFill>
                 <a:latin typeface="Amiri" pitchFamily="2" charset="-78"/>
+                <a:ea typeface="Amiri" pitchFamily="2" charset="-78"/>
                 <a:cs typeface="Amiri" pitchFamily="2" charset="-78"/>
               </a:rPr>
               <a:t>م</a:t>
@@ -32881,6 +33095,7 @@
                   <a:srgbClr val="8A6D1E"/>
                 </a:solidFill>
                 <a:latin typeface="Amiri" pitchFamily="2" charset="-78"/>
+                <a:ea typeface="Amiri" pitchFamily="2" charset="-78"/>
                 <a:cs typeface="Amiri" pitchFamily="2" charset="-78"/>
               </a:rPr>
               <a:t>مَنْ أَنَا؟</a:t>
@@ -33184,6 +33399,7 @@
                   <a:srgbClr val="1B3B6F"/>
                 </a:solidFill>
                 <a:latin typeface="Amiri" pitchFamily="2" charset="-78"/>
+                <a:ea typeface="Amiri" pitchFamily="2" charset="-78"/>
                 <a:cs typeface="Amiri" pitchFamily="2" charset="-78"/>
               </a:rPr>
               <a:t>اسْمِي …</a:t>
@@ -33341,6 +33557,7 @@
                   <a:srgbClr val="1B3B6F"/>
                 </a:solidFill>
                 <a:latin typeface="Amiri" pitchFamily="2" charset="-78"/>
+                <a:ea typeface="Amiri" pitchFamily="2" charset="-78"/>
                 <a:cs typeface="Amiri" pitchFamily="2" charset="-78"/>
               </a:rPr>
               <a:t>اسْمُكَ · اسْمُكِ</a:t>
@@ -33444,6 +33661,7 @@
                   <a:srgbClr val="1B3B6F"/>
                 </a:solidFill>
                 <a:latin typeface="Amiri" pitchFamily="2" charset="-78"/>
+                <a:ea typeface="Amiri" pitchFamily="2" charset="-78"/>
                 <a:cs typeface="Amiri" pitchFamily="2" charset="-78"/>
               </a:rPr>
               <a:t>اسْمُهَا</a:t>
@@ -33547,6 +33765,7 @@
                   <a:srgbClr val="1B3B6F"/>
                 </a:solidFill>
                 <a:latin typeface="Amiri" pitchFamily="2" charset="-78"/>
+                <a:ea typeface="Amiri" pitchFamily="2" charset="-78"/>
                 <a:cs typeface="Amiri" pitchFamily="2" charset="-78"/>
               </a:rPr>
               <a:t>اسْمُهُ</a:t>
@@ -33812,6 +34031,7 @@
                   <a:srgbClr val="1B3B6F"/>
                 </a:solidFill>
                 <a:latin typeface="Amiri" pitchFamily="2" charset="-78"/>
+                <a:ea typeface="Amiri" pitchFamily="2" charset="-78"/>
                 <a:cs typeface="Amiri" pitchFamily="2" charset="-78"/>
               </a:rPr>
               <a:t>أَسْكُنُ فِي …</a:t>
@@ -33969,6 +34189,7 @@
                   <a:srgbClr val="1B3B6F"/>
                 </a:solidFill>
                 <a:latin typeface="Amiri" pitchFamily="2" charset="-78"/>
+                <a:ea typeface="Amiri" pitchFamily="2" charset="-78"/>
                 <a:cs typeface="Amiri" pitchFamily="2" charset="-78"/>
               </a:rPr>
               <a:t>يَسْكُنُونَ</a:t>
@@ -34072,6 +34293,7 @@
                   <a:srgbClr val="1B3B6F"/>
                 </a:solidFill>
                 <a:latin typeface="Amiri" pitchFamily="2" charset="-78"/>
+                <a:ea typeface="Amiri" pitchFamily="2" charset="-78"/>
                 <a:cs typeface="Amiri" pitchFamily="2" charset="-78"/>
               </a:rPr>
               <a:t>تَسْكُنُ</a:t>
@@ -34175,6 +34397,7 @@
                   <a:srgbClr val="1B3B6F"/>
                 </a:solidFill>
                 <a:latin typeface="Amiri" pitchFamily="2" charset="-78"/>
+                <a:ea typeface="Amiri" pitchFamily="2" charset="-78"/>
                 <a:cs typeface="Amiri" pitchFamily="2" charset="-78"/>
               </a:rPr>
               <a:t>يَسْكُنُ</a:t>
@@ -34440,6 +34663,7 @@
                   <a:srgbClr val="1B3B6F"/>
                 </a:solidFill>
                 <a:latin typeface="Amiri" pitchFamily="2" charset="-78"/>
+                <a:ea typeface="Amiri" pitchFamily="2" charset="-78"/>
                 <a:cs typeface="Amiri" pitchFamily="2" charset="-78"/>
               </a:rPr>
               <a:t>وُلِدْتُ فِي …</a:t>
@@ -34597,6 +34821,7 @@
                   <a:srgbClr val="1B3B6F"/>
                 </a:solidFill>
                 <a:latin typeface="Amiri" pitchFamily="2" charset="-78"/>
+                <a:ea typeface="Amiri" pitchFamily="2" charset="-78"/>
                 <a:cs typeface="Amiri" pitchFamily="2" charset="-78"/>
               </a:rPr>
               <a:t>وُلِدُوا</a:t>
@@ -34700,6 +34925,7 @@
                   <a:srgbClr val="1B3B6F"/>
                 </a:solidFill>
                 <a:latin typeface="Amiri" pitchFamily="2" charset="-78"/>
+                <a:ea typeface="Amiri" pitchFamily="2" charset="-78"/>
                 <a:cs typeface="Amiri" pitchFamily="2" charset="-78"/>
               </a:rPr>
               <a:t>وُلِدَتْ</a:t>
@@ -34803,6 +35029,7 @@
                   <a:srgbClr val="1B3B6F"/>
                 </a:solidFill>
                 <a:latin typeface="Amiri" pitchFamily="2" charset="-78"/>
+                <a:ea typeface="Amiri" pitchFamily="2" charset="-78"/>
                 <a:cs typeface="Amiri" pitchFamily="2" charset="-78"/>
               </a:rPr>
               <a:t>وُلِدَ</a:t>
@@ -35068,6 +35295,7 @@
                   <a:srgbClr val="1B3B6F"/>
                 </a:solidFill>
                 <a:latin typeface="Amiri" pitchFamily="2" charset="-78"/>
+                <a:ea typeface="Amiri" pitchFamily="2" charset="-78"/>
                 <a:cs typeface="Amiri" pitchFamily="2" charset="-78"/>
               </a:rPr>
               <a:t>أَتَكَلَّمُ</a:t>
@@ -35225,6 +35453,7 @@
                   <a:srgbClr val="1B3B6F"/>
                 </a:solidFill>
                 <a:latin typeface="Amiri" pitchFamily="2" charset="-78"/>
+                <a:ea typeface="Amiri" pitchFamily="2" charset="-78"/>
                 <a:cs typeface="Amiri" pitchFamily="2" charset="-78"/>
               </a:rPr>
               <a:t>يَتَكَلَّمُونَ</a:t>
@@ -35328,6 +35557,7 @@
                   <a:srgbClr val="1B3B6F"/>
                 </a:solidFill>
                 <a:latin typeface="Amiri" pitchFamily="2" charset="-78"/>
+                <a:ea typeface="Amiri" pitchFamily="2" charset="-78"/>
                 <a:cs typeface="Amiri" pitchFamily="2" charset="-78"/>
               </a:rPr>
               <a:t>تَتَكَلَّمُ</a:t>
@@ -35431,6 +35661,7 @@
                   <a:srgbClr val="1B3B6F"/>
                 </a:solidFill>
                 <a:latin typeface="Amiri" pitchFamily="2" charset="-78"/>
+                <a:ea typeface="Amiri" pitchFamily="2" charset="-78"/>
                 <a:cs typeface="Amiri" pitchFamily="2" charset="-78"/>
               </a:rPr>
               <a:t>يَتَكَلَّمُ</a:t>
@@ -35696,6 +35927,7 @@
                   <a:srgbClr val="1B3B6F"/>
                 </a:solidFill>
                 <a:latin typeface="Amiri" pitchFamily="2" charset="-78"/>
+                <a:ea typeface="Amiri" pitchFamily="2" charset="-78"/>
                 <a:cs typeface="Amiri" pitchFamily="2" charset="-78"/>
               </a:rPr>
               <a:t>عُمْرِي … سَنَةً</a:t>
@@ -35853,6 +36085,7 @@
                   <a:srgbClr val="1B3B6F"/>
                 </a:solidFill>
                 <a:latin typeface="Amiri" pitchFamily="2" charset="-78"/>
+                <a:ea typeface="Amiri" pitchFamily="2" charset="-78"/>
                 <a:cs typeface="Amiri" pitchFamily="2" charset="-78"/>
               </a:rPr>
               <a:t>عُمْرُكَ · عُمْرُكِ</a:t>
@@ -35956,6 +36189,7 @@
                   <a:srgbClr val="1B3B6F"/>
                 </a:solidFill>
                 <a:latin typeface="Amiri" pitchFamily="2" charset="-78"/>
+                <a:ea typeface="Amiri" pitchFamily="2" charset="-78"/>
                 <a:cs typeface="Amiri" pitchFamily="2" charset="-78"/>
               </a:rPr>
               <a:t>عُمْرُهَا</a:t>
@@ -36059,6 +36293,7 @@
                   <a:srgbClr val="1B3B6F"/>
                 </a:solidFill>
                 <a:latin typeface="Amiri" pitchFamily="2" charset="-78"/>
+                <a:ea typeface="Amiri" pitchFamily="2" charset="-78"/>
                 <a:cs typeface="Amiri" pitchFamily="2" charset="-78"/>
               </a:rPr>
               <a:t>عُمْرُهُ</a:t>
@@ -36324,6 +36559,7 @@
                   <a:srgbClr val="1B3B6F"/>
                 </a:solidFill>
                 <a:latin typeface="Amiri" pitchFamily="2" charset="-78"/>
+                <a:ea typeface="Amiri" pitchFamily="2" charset="-78"/>
                 <a:cs typeface="Amiri" pitchFamily="2" charset="-78"/>
               </a:rPr>
               <a:t>عِيدُ مِيلَادِي</a:t>
@@ -36481,6 +36717,7 @@
                   <a:srgbClr val="1B3B6F"/>
                 </a:solidFill>
                 <a:latin typeface="Amiri" pitchFamily="2" charset="-78"/>
+                <a:ea typeface="Amiri" pitchFamily="2" charset="-78"/>
                 <a:cs typeface="Amiri" pitchFamily="2" charset="-78"/>
               </a:rPr>
               <a:t>عِيدُ مِيلَادِهَا</a:t>
@@ -36584,6 +36821,7 @@
                   <a:srgbClr val="1B3B6F"/>
                 </a:solidFill>
                 <a:latin typeface="Amiri" pitchFamily="2" charset="-78"/>
+                <a:ea typeface="Amiri" pitchFamily="2" charset="-78"/>
                 <a:cs typeface="Amiri" pitchFamily="2" charset="-78"/>
               </a:rPr>
               <a:t>عِيدُ مِيلَادِهِ</a:t>
@@ -36717,6 +36955,7 @@
                   <a:srgbClr val="D4AF37"/>
                 </a:solidFill>
                 <a:latin typeface="Amiri" pitchFamily="2" charset="-78"/>
+                <a:ea typeface="Amiri" pitchFamily="2" charset="-78"/>
                 <a:cs typeface="Amiri" pitchFamily="2" charset="-78"/>
               </a:rPr>
               <a:t>م</a:t>
@@ -37037,6 +37276,7 @@
                   <a:srgbClr val="8A6D1E"/>
                 </a:solidFill>
                 <a:latin typeface="Amiri" pitchFamily="2" charset="-78"/>
+                <a:ea typeface="Amiri" pitchFamily="2" charset="-78"/>
                 <a:cs typeface="Amiri" pitchFamily="2" charset="-78"/>
               </a:rPr>
               <a:t>مِنْ أَيْنَ أَنْتَ؟</a:t>
@@ -37340,6 +37580,7 @@
                   <a:srgbClr val="1B3B6F"/>
                 </a:solidFill>
                 <a:latin typeface="Amiri" pitchFamily="2" charset="-78"/>
+                <a:ea typeface="Amiri" pitchFamily="2" charset="-78"/>
                 <a:cs typeface="Amiri" pitchFamily="2" charset="-78"/>
               </a:rPr>
               <a:t>بِرِيطَانِيٌّ</a:t>
@@ -37497,6 +37738,7 @@
                   <a:srgbClr val="1B3B6F"/>
                 </a:solidFill>
                 <a:latin typeface="Amiri" pitchFamily="2" charset="-78"/>
+                <a:ea typeface="Amiri" pitchFamily="2" charset="-78"/>
                 <a:cs typeface="Amiri" pitchFamily="2" charset="-78"/>
               </a:rPr>
               <a:t>بِرِيطَانِيُّونَ</a:t>
@@ -37600,6 +37842,7 @@
                   <a:srgbClr val="1B3B6F"/>
                 </a:solidFill>
                 <a:latin typeface="Amiri" pitchFamily="2" charset="-78"/>
+                <a:ea typeface="Amiri" pitchFamily="2" charset="-78"/>
                 <a:cs typeface="Amiri" pitchFamily="2" charset="-78"/>
               </a:rPr>
               <a:t>بِرِيطَانِيَّةٌ</a:t>
@@ -37703,6 +37946,7 @@
                   <a:srgbClr val="1B3B6F"/>
                 </a:solidFill>
                 <a:latin typeface="Amiri" pitchFamily="2" charset="-78"/>
+                <a:ea typeface="Amiri" pitchFamily="2" charset="-78"/>
                 <a:cs typeface="Amiri" pitchFamily="2" charset="-78"/>
               </a:rPr>
               <a:t>بِرِيطَانِيٌّ</a:t>
@@ -37968,6 +38212,7 @@
                   <a:srgbClr val="1B3B6F"/>
                 </a:solidFill>
                 <a:latin typeface="Amiri" pitchFamily="2" charset="-78"/>
+                <a:ea typeface="Amiri" pitchFamily="2" charset="-78"/>
                 <a:cs typeface="Amiri" pitchFamily="2" charset="-78"/>
               </a:rPr>
               <a:t>مِصْرِيٌّ</a:t>
@@ -38125,6 +38370,7 @@
                   <a:srgbClr val="1B3B6F"/>
                 </a:solidFill>
                 <a:latin typeface="Amiri" pitchFamily="2" charset="-78"/>
+                <a:ea typeface="Amiri" pitchFamily="2" charset="-78"/>
                 <a:cs typeface="Amiri" pitchFamily="2" charset="-78"/>
               </a:rPr>
               <a:t>مِصْرِيُّونَ</a:t>
@@ -38228,6 +38474,7 @@
                   <a:srgbClr val="1B3B6F"/>
                 </a:solidFill>
                 <a:latin typeface="Amiri" pitchFamily="2" charset="-78"/>
+                <a:ea typeface="Amiri" pitchFamily="2" charset="-78"/>
                 <a:cs typeface="Amiri" pitchFamily="2" charset="-78"/>
               </a:rPr>
               <a:t>مِصْرِيَّةٌ</a:t>
@@ -38331,6 +38578,7 @@
                   <a:srgbClr val="1B3B6F"/>
                 </a:solidFill>
                 <a:latin typeface="Amiri" pitchFamily="2" charset="-78"/>
+                <a:ea typeface="Amiri" pitchFamily="2" charset="-78"/>
                 <a:cs typeface="Amiri" pitchFamily="2" charset="-78"/>
               </a:rPr>
               <a:t>مِصْرِيٌّ</a:t>
@@ -38596,6 +38844,7 @@
                   <a:srgbClr val="1B3B6F"/>
                 </a:solidFill>
                 <a:latin typeface="Amiri" pitchFamily="2" charset="-78"/>
+                <a:ea typeface="Amiri" pitchFamily="2" charset="-78"/>
                 <a:cs typeface="Amiri" pitchFamily="2" charset="-78"/>
               </a:rPr>
               <a:t>عَرَبِيٌّ</a:t>
@@ -38753,6 +39002,7 @@
                   <a:srgbClr val="1B3B6F"/>
                 </a:solidFill>
                 <a:latin typeface="Amiri" pitchFamily="2" charset="-78"/>
+                <a:ea typeface="Amiri" pitchFamily="2" charset="-78"/>
                 <a:cs typeface="Amiri" pitchFamily="2" charset="-78"/>
               </a:rPr>
               <a:t>عَرَبٌ</a:t>
@@ -38856,6 +39106,7 @@
                   <a:srgbClr val="1B3B6F"/>
                 </a:solidFill>
                 <a:latin typeface="Amiri" pitchFamily="2" charset="-78"/>
+                <a:ea typeface="Amiri" pitchFamily="2" charset="-78"/>
                 <a:cs typeface="Amiri" pitchFamily="2" charset="-78"/>
               </a:rPr>
               <a:t>عَرَبِيَّةٌ</a:t>
@@ -38959,6 +39210,7 @@
                   <a:srgbClr val="1B3B6F"/>
                 </a:solidFill>
                 <a:latin typeface="Amiri" pitchFamily="2" charset="-78"/>
+                <a:ea typeface="Amiri" pitchFamily="2" charset="-78"/>
                 <a:cs typeface="Amiri" pitchFamily="2" charset="-78"/>
               </a:rPr>
               <a:t>عَرَبِيٌّ</a:t>
@@ -39224,6 +39476,7 @@
                   <a:srgbClr val="1B3B6F"/>
                 </a:solidFill>
                 <a:latin typeface="Amiri" pitchFamily="2" charset="-78"/>
+                <a:ea typeface="Amiri" pitchFamily="2" charset="-78"/>
                 <a:cs typeface="Amiri" pitchFamily="2" charset="-78"/>
               </a:rPr>
               <a:t>طَالِبٌ</a:t>
@@ -39381,6 +39634,7 @@
                   <a:srgbClr val="1B3B6F"/>
                 </a:solidFill>
                 <a:latin typeface="Amiri" pitchFamily="2" charset="-78"/>
+                <a:ea typeface="Amiri" pitchFamily="2" charset="-78"/>
                 <a:cs typeface="Amiri" pitchFamily="2" charset="-78"/>
               </a:rPr>
               <a:t>طُلَّابٌ · طَالِبَاتٌ</a:t>
@@ -39484,6 +39738,7 @@
                   <a:srgbClr val="1B3B6F"/>
                 </a:solidFill>
                 <a:latin typeface="Amiri" pitchFamily="2" charset="-78"/>
+                <a:ea typeface="Amiri" pitchFamily="2" charset="-78"/>
                 <a:cs typeface="Amiri" pitchFamily="2" charset="-78"/>
               </a:rPr>
               <a:t>طَالِبَةٌ</a:t>
@@ -39587,6 +39842,7 @@
                   <a:srgbClr val="1B3B6F"/>
                 </a:solidFill>
                 <a:latin typeface="Amiri" pitchFamily="2" charset="-78"/>
+                <a:ea typeface="Amiri" pitchFamily="2" charset="-78"/>
                 <a:cs typeface="Amiri" pitchFamily="2" charset="-78"/>
               </a:rPr>
               <a:t>طَالِبٌ</a:t>
@@ -39852,6 +40108,7 @@
                   <a:srgbClr val="1B3B6F"/>
                 </a:solidFill>
                 <a:latin typeface="Amiri" pitchFamily="2" charset="-78"/>
+                <a:ea typeface="Amiri" pitchFamily="2" charset="-78"/>
                 <a:cs typeface="Amiri" pitchFamily="2" charset="-78"/>
               </a:rPr>
               <a:t>أَصْلِي مِنْ …</a:t>
@@ -40009,6 +40266,7 @@
                   <a:srgbClr val="1B3B6F"/>
                 </a:solidFill>
                 <a:latin typeface="Amiri" pitchFamily="2" charset="-78"/>
+                <a:ea typeface="Amiri" pitchFamily="2" charset="-78"/>
                 <a:cs typeface="Amiri" pitchFamily="2" charset="-78"/>
               </a:rPr>
               <a:t>أَصْلُهَا</a:t>
@@ -40112,6 +40370,7 @@
                   <a:srgbClr val="1B3B6F"/>
                 </a:solidFill>
                 <a:latin typeface="Amiri" pitchFamily="2" charset="-78"/>
+                <a:ea typeface="Amiri" pitchFamily="2" charset="-78"/>
                 <a:cs typeface="Amiri" pitchFamily="2" charset="-78"/>
               </a:rPr>
               <a:t>أَصْلُهُ</a:t>
@@ -40377,6 +40636,7 @@
                   <a:srgbClr val="1B3B6F"/>
                 </a:solidFill>
                 <a:latin typeface="Amiri" pitchFamily="2" charset="-78"/>
+                <a:ea typeface="Amiri" pitchFamily="2" charset="-78"/>
                 <a:cs typeface="Amiri" pitchFamily="2" charset="-78"/>
               </a:rPr>
               <a:t>لُغَةٌ</a:t>
@@ -40534,6 +40794,7 @@
                   <a:srgbClr val="1B3B6F"/>
                 </a:solidFill>
                 <a:latin typeface="Amiri" pitchFamily="2" charset="-78"/>
+                <a:ea typeface="Amiri" pitchFamily="2" charset="-78"/>
                 <a:cs typeface="Amiri" pitchFamily="2" charset="-78"/>
               </a:rPr>
               <a:t>لُغَاتٌ</a:t>
@@ -40637,6 +40898,7 @@
                   <a:srgbClr val="1B3B6F"/>
                 </a:solidFill>
                 <a:latin typeface="Amiri" pitchFamily="2" charset="-78"/>
+                <a:ea typeface="Amiri" pitchFamily="2" charset="-78"/>
                 <a:cs typeface="Amiri" pitchFamily="2" charset="-78"/>
               </a:rPr>
               <a:t>لُغَةٌ</a:t>
@@ -40770,6 +41032,7 @@
                   <a:srgbClr val="D4AF37"/>
                 </a:solidFill>
                 <a:latin typeface="Amiri" pitchFamily="2" charset="-78"/>
+                <a:ea typeface="Amiri" pitchFamily="2" charset="-78"/>
                 <a:cs typeface="Amiri" pitchFamily="2" charset="-78"/>
               </a:rPr>
               <a:t>م</a:t>
@@ -41090,6 +41353,7 @@
                   <a:srgbClr val="8A6D1E"/>
                 </a:solidFill>
                 <a:latin typeface="Amiri" pitchFamily="2" charset="-78"/>
+                <a:ea typeface="Amiri" pitchFamily="2" charset="-78"/>
                 <a:cs typeface="Amiri" pitchFamily="2" charset="-78"/>
               </a:rPr>
               <a:t>فِي الغُرَفِ</a:t>
@@ -42266,6 +42530,7 @@
                   <a:srgbClr val="1B3B6F"/>
                 </a:solidFill>
                 <a:latin typeface="Amiri" pitchFamily="2" charset="-78"/>
+                <a:ea typeface="Amiri" pitchFamily="2" charset="-78"/>
                 <a:cs typeface="Amiri" pitchFamily="2" charset="-78"/>
               </a:rPr>
               <a:t>دَوْرُكَ!</a:t>
@@ -42342,6 +42607,7 @@
                   <a:srgbClr val="1B3B6F"/>
                 </a:solidFill>
                 <a:latin typeface="Amiri" pitchFamily="2" charset="-78"/>
+                <a:ea typeface="Amiri" pitchFamily="2" charset="-78"/>
                 <a:cs typeface="Amiri" pitchFamily="2" charset="-78"/>
               </a:rPr>
               <a:t>أَحْسَنْتَ! / أَحْسَنْتِ!</a:t>
@@ -42418,6 +42684,7 @@
                   <a:srgbClr val="1B3B6F"/>
                 </a:solidFill>
                 <a:latin typeface="Amiri" pitchFamily="2" charset="-78"/>
+                <a:ea typeface="Amiri" pitchFamily="2" charset="-78"/>
                 <a:cs typeface="Amiri" pitchFamily="2" charset="-78"/>
               </a:rPr>
               <a:t>تَكَلَّمْ أَكْثَرَ، مِنْ فَضْلِكَ</a:t>
@@ -42494,6 +42761,7 @@
                   <a:srgbClr val="1B3B6F"/>
                 </a:solidFill>
                 <a:latin typeface="Amiri" pitchFamily="2" charset="-78"/>
+                <a:ea typeface="Amiri" pitchFamily="2" charset="-78"/>
                 <a:cs typeface="Amiri" pitchFamily="2" charset="-78"/>
               </a:rPr>
               <a:t>لِمَاذَا؟</a:t>
@@ -42665,6 +42933,7 @@
                   <a:srgbClr val="D4AF37"/>
                 </a:solidFill>
                 <a:latin typeface="Amiri" pitchFamily="2" charset="-78"/>
+                <a:ea typeface="Amiri" pitchFamily="2" charset="-78"/>
                 <a:cs typeface="Amiri" pitchFamily="2" charset="-78"/>
               </a:rPr>
               <a:t>م</a:t>
@@ -42985,6 +43254,7 @@
                   <a:srgbClr val="8A6D1E"/>
                 </a:solidFill>
                 <a:latin typeface="Amiri" pitchFamily="2" charset="-78"/>
+                <a:ea typeface="Amiri" pitchFamily="2" charset="-78"/>
                 <a:cs typeface="Amiri" pitchFamily="2" charset="-78"/>
               </a:rPr>
               <a:t>فِي نَادِي الشَّبَابِ</a:t>
@@ -43265,6 +43535,7 @@
                   <a:srgbClr val="1B3B6F"/>
                 </a:solidFill>
                 <a:latin typeface="Amiri" pitchFamily="2" charset="-78"/>
+                <a:ea typeface="Amiri" pitchFamily="2" charset="-78"/>
                 <a:cs typeface="Amiri" pitchFamily="2" charset="-78"/>
               </a:rPr>
               <a:t>اسْمِي …</a:t>
@@ -43341,6 +43612,7 @@
                   <a:srgbClr val="1B3B6F"/>
                 </a:solidFill>
                 <a:latin typeface="Amiri" pitchFamily="2" charset="-78"/>
+                <a:ea typeface="Amiri" pitchFamily="2" charset="-78"/>
                 <a:cs typeface="Amiri" pitchFamily="2" charset="-78"/>
               </a:rPr>
               <a:t>أَهْلًا! مَا اسْمُكَ الكَامِلُ؟</a:t>
@@ -43509,6 +43781,7 @@
                   <a:srgbClr val="1B3B6F"/>
                 </a:solidFill>
                 <a:latin typeface="Amiri" pitchFamily="2" charset="-78"/>
+                <a:ea typeface="Amiri" pitchFamily="2" charset="-78"/>
                 <a:cs typeface="Amiri" pitchFamily="2" charset="-78"/>
               </a:rPr>
               <a:t>عُمْرِي … سَنَةً</a:t>
@@ -43585,6 +43858,7 @@
                   <a:srgbClr val="1B3B6F"/>
                 </a:solidFill>
                 <a:latin typeface="Amiri" pitchFamily="2" charset="-78"/>
+                <a:ea typeface="Amiri" pitchFamily="2" charset="-78"/>
                 <a:cs typeface="Amiri" pitchFamily="2" charset="-78"/>
               </a:rPr>
               <a:t>كَمْ عُمْرُكَ؟</a:t>
@@ -43753,6 +44027,7 @@
                   <a:srgbClr val="1B3B6F"/>
                 </a:solidFill>
                 <a:latin typeface="Amiri" pitchFamily="2" charset="-78"/>
+                <a:ea typeface="Amiri" pitchFamily="2" charset="-78"/>
                 <a:cs typeface="Amiri" pitchFamily="2" charset="-78"/>
               </a:rPr>
               <a:t>عِيدُ مِيلَادِي فِي …</a:t>
@@ -43829,6 +44104,7 @@
                   <a:srgbClr val="1B3B6F"/>
                 </a:solidFill>
                 <a:latin typeface="Amiri" pitchFamily="2" charset="-78"/>
+                <a:ea typeface="Amiri" pitchFamily="2" charset="-78"/>
                 <a:cs typeface="Amiri" pitchFamily="2" charset="-78"/>
               </a:rPr>
               <a:t>مَتَى عِيدُ مِيلَادِكَ؟</a:t>
@@ -43997,6 +44273,7 @@
                   <a:srgbClr val="1B3B6F"/>
                 </a:solidFill>
                 <a:latin typeface="Amiri" pitchFamily="2" charset="-78"/>
+                <a:ea typeface="Amiri" pitchFamily="2" charset="-78"/>
                 <a:cs typeface="Amiri" pitchFamily="2" charset="-78"/>
               </a:rPr>
               <a:t>أَسْكُنُ فِي …</a:t>
@@ -44073,6 +44350,7 @@
                   <a:srgbClr val="1B3B6F"/>
                 </a:solidFill>
                 <a:latin typeface="Amiri" pitchFamily="2" charset="-78"/>
+                <a:ea typeface="Amiri" pitchFamily="2" charset="-78"/>
                 <a:cs typeface="Amiri" pitchFamily="2" charset="-78"/>
               </a:rPr>
               <a:t>أَيْنَ تَسْكُنُ؟</a:t>
@@ -44241,6 +44519,7 @@
                   <a:srgbClr val="1B3B6F"/>
                 </a:solidFill>
                 <a:latin typeface="Amiri" pitchFamily="2" charset="-78"/>
+                <a:ea typeface="Amiri" pitchFamily="2" charset="-78"/>
                 <a:cs typeface="Amiri" pitchFamily="2" charset="-78"/>
               </a:rPr>
               <a:t>أَنَا … وَأَصْلِي مِنْ …</a:t>
@@ -44317,6 +44596,7 @@
                   <a:srgbClr val="1B3B6F"/>
                 </a:solidFill>
                 <a:latin typeface="Amiri" pitchFamily="2" charset="-78"/>
+                <a:ea typeface="Amiri" pitchFamily="2" charset="-78"/>
                 <a:cs typeface="Amiri" pitchFamily="2" charset="-78"/>
               </a:rPr>
               <a:t>مَا جِنْسِيَّتُكَ؟</a:t>
@@ -44591,6 +44871,7 @@
                   <a:srgbClr val="D4AF37"/>
                 </a:solidFill>
                 <a:latin typeface="Amiri" pitchFamily="2" charset="-78"/>
+                <a:ea typeface="Amiri" pitchFamily="2" charset="-78"/>
                 <a:cs typeface="Amiri" pitchFamily="2" charset="-78"/>
               </a:rPr>
               <a:t>م</a:t>
@@ -44911,6 +45192,7 @@
                   <a:srgbClr val="8A6D1E"/>
                 </a:solidFill>
                 <a:latin typeface="Amiri" pitchFamily="2" charset="-78"/>
+                <a:ea typeface="Amiri" pitchFamily="2" charset="-78"/>
                 <a:cs typeface="Amiri" pitchFamily="2" charset="-78"/>
               </a:rPr>
               <a:t>زَمِيلٌ جَدِيدٌ</a:t>
@@ -45191,6 +45473,7 @@
                   <a:srgbClr val="1B3B6F"/>
                 </a:solidFill>
                 <a:latin typeface="Amiri" pitchFamily="2" charset="-78"/>
+                <a:ea typeface="Amiri" pitchFamily="2" charset="-78"/>
                 <a:cs typeface="Amiri" pitchFamily="2" charset="-78"/>
               </a:rPr>
               <a:t>أَهْلًا! اسْمِي …</a:t>
@@ -45267,6 +45550,7 @@
                   <a:srgbClr val="1B3B6F"/>
                 </a:solidFill>
                 <a:latin typeface="Amiri" pitchFamily="2" charset="-78"/>
+                <a:ea typeface="Amiri" pitchFamily="2" charset="-78"/>
                 <a:cs typeface="Amiri" pitchFamily="2" charset="-78"/>
               </a:rPr>
               <a:t>مَرْحَبًا، أَنَا جَدِيدٌ هُنَا. مَا اسْمُكَ؟</a:t>
@@ -45435,6 +45719,7 @@
                   <a:srgbClr val="1B3B6F"/>
                 </a:solidFill>
                 <a:latin typeface="Amiri" pitchFamily="2" charset="-78"/>
+                <a:ea typeface="Amiri" pitchFamily="2" charset="-78"/>
                 <a:cs typeface="Amiri" pitchFamily="2" charset="-78"/>
               </a:rPr>
               <a:t>أَنَا مِنْ … وَوُلِدْتُ فِي …</a:t>
@@ -45511,6 +45796,7 @@
                   <a:srgbClr val="1B3B6F"/>
                 </a:solidFill>
                 <a:latin typeface="Amiri" pitchFamily="2" charset="-78"/>
+                <a:ea typeface="Amiri" pitchFamily="2" charset="-78"/>
                 <a:cs typeface="Amiri" pitchFamily="2" charset="-78"/>
               </a:rPr>
               <a:t>مِنْ أَيْنَ أَنْتِ؟</a:t>
@@ -45679,6 +45965,7 @@
                   <a:srgbClr val="1B3B6F"/>
                 </a:solidFill>
                 <a:latin typeface="Amiri" pitchFamily="2" charset="-78"/>
+                <a:ea typeface="Amiri" pitchFamily="2" charset="-78"/>
                 <a:cs typeface="Amiri" pitchFamily="2" charset="-78"/>
               </a:rPr>
               <a:t>أَيَّ لُغَاتٍ …؟</a:t>
@@ -45755,6 +46042,7 @@
                   <a:srgbClr val="1B3B6F"/>
                 </a:solidFill>
                 <a:latin typeface="Amiri" pitchFamily="2" charset="-78"/>
+                <a:ea typeface="Amiri" pitchFamily="2" charset="-78"/>
                 <a:cs typeface="Amiri" pitchFamily="2" charset="-78"/>
               </a:rPr>
               <a:t>… أَنَا مِنْ تُونِسَ.</a:t>
@@ -45858,6 +46146,7 @@
                   <a:srgbClr val="1B3B6F"/>
                 </a:solidFill>
                 <a:latin typeface="Amiri" pitchFamily="2" charset="-78"/>
+                <a:ea typeface="Amiri" pitchFamily="2" charset="-78"/>
                 <a:cs typeface="Amiri" pitchFamily="2" charset="-78"/>
               </a:rPr>
               <a:t>أَتَكَلَّمُ … جَيِّدًا وَ… قَلِيلًا</a:t>
@@ -45934,6 +46223,7 @@
                   <a:srgbClr val="1B3B6F"/>
                 </a:solidFill>
                 <a:latin typeface="Amiri" pitchFamily="2" charset="-78"/>
+                <a:ea typeface="Amiri" pitchFamily="2" charset="-78"/>
                 <a:cs typeface="Amiri" pitchFamily="2" charset="-78"/>
               </a:rPr>
               <a:t>العَرَبِيَّةَ وَالفَرَنْسِيَّةَ. وَأَنْتِ؟</a:t>
@@ -46037,6 +46327,7 @@
                   <a:srgbClr val="1B3B6F"/>
                 </a:solidFill>
                 <a:latin typeface="Amiri" pitchFamily="2" charset="-78"/>
+                <a:ea typeface="Amiri" pitchFamily="2" charset="-78"/>
                 <a:cs typeface="Amiri" pitchFamily="2" charset="-78"/>
               </a:rPr>
               <a:t>اسْمُهُ / اسْمُهَا … وَهُوَ / هِيَ …</a:t>
@@ -46113,6 +46404,7 @@
                   <a:srgbClr val="1B3B6F"/>
                 </a:solidFill>
                 <a:latin typeface="Amiri" pitchFamily="2" charset="-78"/>
+                <a:ea typeface="Amiri" pitchFamily="2" charset="-78"/>
                 <a:cs typeface="Amiri" pitchFamily="2" charset="-78"/>
               </a:rPr>
               <a:t>مَنْ مُعَلِّمُ العَرَبِيَّةِ؟</a:t>
@@ -46287,13 +46579,9 @@
     <a:fontScheme name="Office">
       <a:majorFont>
         <a:latin typeface="Calibri Light" panose="020F0302020204030204"/>
-        <a:ea typeface=""/>
-        <a:cs typeface=""/>
-        <a:font script="Jpan" typeface="游ゴシック Light"/>
-        <a:font script="Hang" typeface="맑은 고딕"/>
-        <a:font script="Hans" typeface="等线 Light"/>
-        <a:font script="Hant" typeface="新細明體"/>
-        <a:font script="Arab" typeface="Times New Roman"/>
+        <a:ea typeface="Amiri" pitchFamily="2" charset="-78"/>
+        <a:cs typeface="Amiri" pitchFamily="2" charset="-78"/>
+        <a:font script="Arab" typeface="Amiri"/>
         <a:font script="Hebr" typeface="Times New Roman"/>
         <a:font script="Thai" typeface="Angsana New"/>
         <a:font script="Ethi" typeface="Nyala"/>
@@ -46339,13 +46627,9 @@
       </a:majorFont>
       <a:minorFont>
         <a:latin typeface="Calibri" panose="020F0502020204030204"/>
-        <a:ea typeface=""/>
-        <a:cs typeface=""/>
-        <a:font script="Jpan" typeface="游ゴシック"/>
-        <a:font script="Hang" typeface="맑은 고딕"/>
-        <a:font script="Hans" typeface="等线"/>
-        <a:font script="Hant" typeface="新細明體"/>
-        <a:font script="Arab" typeface="Arial"/>
+        <a:ea typeface="Amiri" pitchFamily="2" charset="-78"/>
+        <a:cs typeface="Amiri" pitchFamily="2" charset="-78"/>
+        <a:font script="Arab" typeface="Amiri"/>
         <a:font script="Hebr" typeface="Arial"/>
         <a:font script="Thai" typeface="Cordia New"/>
         <a:font script="Ethi" typeface="Nyala"/>
